--- a/pertemuan_01_pengenalan_flutter/slide/PERTEMUAN_01_Pengenalan_Flutter.pptx
+++ b/pertemuan_01_pengenalan_flutter/slide/PERTEMUAN_01_Pengenalan_Flutter.pptx
@@ -133,14 +133,14 @@
   <p:extLst>
     <p:ext uri="{521415D9-36F7-43E2-AB2F-B90AF26B5E84}">
       <p14:sectionLst xmlns:p14="http://schemas.microsoft.com/office/powerpoint/2010/main">
-        <p14:section name="Pembuka" id="{3811ae53-2f0b-a551-2ed9-9ae21bce7f4b}">
+        <p14:section name="Pembuka" id="{9814c19b-9a5d-7374-6268-cce7746ed3af}">
           <p14:sldIdLst>
             <p14:sldId id="256"/>
             <p14:sldId id="257"/>
             <p14:sldId id="258"/>
           </p14:sldIdLst>
         </p14:section>
-        <p14:section name="Mengenal Dunia Aplikasi Mobile" id="{4fa511fa-8b5d-9974-fcbe-523cdf8a5628}">
+        <p14:section name="Mengenal Dunia Aplikasi Mobile" id="{f06325b5-6e22-b479-95ad-7d91b2f3a752}">
           <p14:sldIdLst>
             <p14:sldId id="259"/>
             <p14:sldId id="260"/>
@@ -151,14 +151,14 @@
             <p14:sldId id="265"/>
           </p14:sldIdLst>
         </p14:section>
-        <p14:section name="Siklus Hidup (Lifecycle) Aplikasi" id="{5dd3b44d-c8cd-aabe-dafb-ccba5d8ce77f}">
+        <p14:section name="Siklus Hidup (Lifecycle) Aplikasi" id="{2784f7d3-54dc-0bf9-96ad-73f5170ec9a7}">
           <p14:sldIdLst>
             <p14:sldId id="266"/>
             <p14:sldId id="267"/>
             <p14:sldId id="268"/>
           </p14:sldIdLst>
         </p14:section>
-        <p14:section name="Menyiapkan Alat &amp; Proyek Pertama" id="{932a8960-2be2-98f9-fe8a-be4ba5f7f727}">
+        <p14:section name="Menyiapkan Alat &amp; Proyek Pertama" id="{48bdc4c2-076f-465d-5bbc-31e27d978e6a}">
           <p14:sldIdLst>
             <p14:sldId id="269"/>
             <p14:sldId id="270"/>
@@ -7215,7 +7215,7 @@
       <p:sp>
         <p:nvSpPr>
           <p:cNvPr id="5" name="tombol tautan">
-            <a:hlinkClick r:id="rId1" tooltip="https://github.com/antonprafanto/mobile2026/blob/main/pertemuan_01_pengenalan_flutter/kode/06_siklus_hidup_aplikasi.dart"/>
+            <a:hlinkClick r:id="rId1" tooltip="https://github.com/antonprafanto/mobile2026/blob/main/pertemuan_01_pengenalan_flutter/kode/contoh_06_siklus_hidup_aplikasi.dart"/>
           </p:cNvPr>
           <p:cNvSpPr txBox="1"/>
           <p:nvPr/>
@@ -7248,7 +7248,7 @@
                   <a:schemeClr val="bg1"/>
                 </a:solidFill>
               </a:rPr>
-              <a:t>Buka kode lengkap di GitHub  ·  06_siklus_hidup_aplikasi.dart</a:t>
+              <a:t>Buka kode lengkap di GitHub  ·  contoh_06_siklus_hidup_aplikasi.dart</a:t>
             </a:r>
             <a:endParaRPr lang="en-US" sz="1300" dirty="0"/>
           </a:p>
@@ -7257,7 +7257,7 @@
       <p:pic>
         <p:nvPicPr>
           <p:cNvPr id="6" name="Image 0" descr="ikon tautan">
-            <a:hlinkClick r:id="rId3" tooltip="https://github.com/antonprafanto/mobile2026/blob/main/pertemuan_01_pengenalan_flutter/kode/06_siklus_hidup_aplikasi.dart"/>
+            <a:hlinkClick r:id="rId3" tooltip="https://github.com/antonprafanto/mobile2026/blob/main/pertemuan_01_pengenalan_flutter/kode/contoh_06_siklus_hidup_aplikasi.dart"/>
           </p:cNvPr>
           <p:cNvPicPr>
             <a:picLocks noChangeAspect="1"/>
@@ -13339,7 +13339,7 @@
       <p:sp>
         <p:nvSpPr>
           <p:cNvPr id="5" name="tombol tautan">
-            <a:hlinkClick r:id="rId1" tooltip="https://github.com/antonprafanto/mobile2026/blob/main/pertemuan_01_pengenalan_flutter/kode/01_aplikasi_pertama.dart"/>
+            <a:hlinkClick r:id="rId1" tooltip="https://github.com/antonprafanto/mobile2026/blob/main/pertemuan_01_pengenalan_flutter/kode/contoh_01_aplikasi_pertama.dart"/>
           </p:cNvPr>
           <p:cNvSpPr txBox="1"/>
           <p:nvPr/>
@@ -13372,7 +13372,7 @@
                   <a:schemeClr val="bg1"/>
                 </a:solidFill>
               </a:rPr>
-              <a:t>Buka kode lengkap di GitHub  ·  01_aplikasi_pertama.dart</a:t>
+              <a:t>Buka kode lengkap di GitHub  ·  contoh_01_aplikasi_pertama.dart</a:t>
             </a:r>
             <a:endParaRPr lang="en-US" sz="1300" dirty="0"/>
           </a:p>
@@ -13381,7 +13381,7 @@
       <p:pic>
         <p:nvPicPr>
           <p:cNvPr id="6" name="Image 0" descr="ikon tautan">
-            <a:hlinkClick r:id="rId3" tooltip="https://github.com/antonprafanto/mobile2026/blob/main/pertemuan_01_pengenalan_flutter/kode/01_aplikasi_pertama.dart"/>
+            <a:hlinkClick r:id="rId3" tooltip="https://github.com/antonprafanto/mobile2026/blob/main/pertemuan_01_pengenalan_flutter/kode/contoh_01_aplikasi_pertama.dart"/>
           </p:cNvPr>
           <p:cNvPicPr>
             <a:picLocks noChangeAspect="1"/>
@@ -14774,7 +14774,7 @@
       <p:sp>
         <p:nvSpPr>
           <p:cNvPr id="5" name="tombol tautan">
-            <a:hlinkClick r:id="rId1" tooltip="https://github.com/antonprafanto/mobile2026/blob/main/pertemuan_01_pengenalan_flutter/kode/02_materialapp_dan_scaffold.dart"/>
+            <a:hlinkClick r:id="rId1" tooltip="https://github.com/antonprafanto/mobile2026/blob/main/pertemuan_01_pengenalan_flutter/kode/contoh_02_materialapp_dan_scaffold.dart"/>
           </p:cNvPr>
           <p:cNvSpPr txBox="1"/>
           <p:nvPr/>
@@ -14807,7 +14807,7 @@
                   <a:schemeClr val="bg1"/>
                 </a:solidFill>
               </a:rPr>
-              <a:t>Buka kode lengkap di GitHub  ·  02_materialapp_dan_scaffold.dart</a:t>
+              <a:t>Buka kode lengkap di GitHub  ·  contoh_02_materialapp_dan_scaffold.dart</a:t>
             </a:r>
             <a:endParaRPr lang="en-US" sz="1300" dirty="0"/>
           </a:p>
@@ -14816,7 +14816,7 @@
       <p:pic>
         <p:nvPicPr>
           <p:cNvPr id="6" name="Image 0" descr="ikon tautan">
-            <a:hlinkClick r:id="rId3" tooltip="https://github.com/antonprafanto/mobile2026/blob/main/pertemuan_01_pengenalan_flutter/kode/02_materialapp_dan_scaffold.dart"/>
+            <a:hlinkClick r:id="rId3" tooltip="https://github.com/antonprafanto/mobile2026/blob/main/pertemuan_01_pengenalan_flutter/kode/contoh_02_materialapp_dan_scaffold.dart"/>
           </p:cNvPr>
           <p:cNvPicPr>
             <a:picLocks noChangeAspect="1"/>
@@ -15690,7 +15690,7 @@
       <p:sp>
         <p:nvSpPr>
           <p:cNvPr id="5" name="tombol tautan">
-            <a:hlinkClick r:id="rId1" tooltip="https://github.com/antonprafanto/mobile2026/blob/main/pertemuan_01_pengenalan_flutter/kode/03_tema_warna_dan_teks.dart"/>
+            <a:hlinkClick r:id="rId1" tooltip="https://github.com/antonprafanto/mobile2026/blob/main/pertemuan_01_pengenalan_flutter/kode/contoh_03_tema_warna_dan_teks.dart"/>
           </p:cNvPr>
           <p:cNvSpPr txBox="1"/>
           <p:nvPr/>
@@ -15723,7 +15723,7 @@
                   <a:schemeClr val="bg1"/>
                 </a:solidFill>
               </a:rPr>
-              <a:t>Buka kode lengkap di GitHub  ·  03_tema_warna_dan_teks.dart</a:t>
+              <a:t>Buka kode lengkap di GitHub  ·  contoh_03_tema_warna_dan_teks.dart</a:t>
             </a:r>
             <a:endParaRPr lang="en-US" sz="1300" dirty="0"/>
           </a:p>
@@ -15732,7 +15732,7 @@
       <p:pic>
         <p:nvPicPr>
           <p:cNvPr id="6" name="Image 0" descr="ikon tautan">
-            <a:hlinkClick r:id="rId3" tooltip="https://github.com/antonprafanto/mobile2026/blob/main/pertemuan_01_pengenalan_flutter/kode/03_tema_warna_dan_teks.dart"/>
+            <a:hlinkClick r:id="rId3" tooltip="https://github.com/antonprafanto/mobile2026/blob/main/pertemuan_01_pengenalan_flutter/kode/contoh_03_tema_warna_dan_teks.dart"/>
           </p:cNvPr>
           <p:cNvPicPr>
             <a:picLocks noChangeAspect="1"/>
@@ -17198,7 +17198,7 @@
       <p:sp>
         <p:nvSpPr>
           <p:cNvPr id="5" name="tombol tautan">
-            <a:hlinkClick r:id="rId1" tooltip="https://github.com/antonprafanto/mobile2026/blob/main/pertemuan_01_pengenalan_flutter/kode/04_hot_reload_vs_hot_restart.dart"/>
+            <a:hlinkClick r:id="rId1" tooltip="https://github.com/antonprafanto/mobile2026/blob/main/pertemuan_01_pengenalan_flutter/kode/contoh_04_hot_reload_vs_hot_restart.dart"/>
           </p:cNvPr>
           <p:cNvSpPr txBox="1"/>
           <p:nvPr/>
@@ -17231,7 +17231,7 @@
                   <a:schemeClr val="bg1"/>
                 </a:solidFill>
               </a:rPr>
-              <a:t>Buka kode lengkap di GitHub  ·  04_hot_reload_vs_hot_restart.dart</a:t>
+              <a:t>Buka kode lengkap di GitHub  ·  contoh_04_hot_reload_vs_hot_restart.dart</a:t>
             </a:r>
             <a:endParaRPr lang="en-US" sz="1300" dirty="0"/>
           </a:p>
@@ -17240,7 +17240,7 @@
       <p:pic>
         <p:nvPicPr>
           <p:cNvPr id="6" name="Image 0" descr="ikon tautan">
-            <a:hlinkClick r:id="rId3" tooltip="https://github.com/antonprafanto/mobile2026/blob/main/pertemuan_01_pengenalan_flutter/kode/04_hot_reload_vs_hot_restart.dart"/>
+            <a:hlinkClick r:id="rId3" tooltip="https://github.com/antonprafanto/mobile2026/blob/main/pertemuan_01_pengenalan_flutter/kode/contoh_04_hot_reload_vs_hot_restart.dart"/>
           </p:cNvPr>
           <p:cNvPicPr>
             <a:picLocks noChangeAspect="1"/>
@@ -18360,7 +18360,7 @@
       <p:sp>
         <p:nvSpPr>
           <p:cNvPr id="39" name="tombol tautan">
-            <a:hlinkClick r:id="rId6" tooltip="https://github.com/antonprafanto/mobile2026/blob/main/pertemuan_01_pengenalan_flutter/kode/05_aplikasi_counter_bawaan.dart"/>
+            <a:hlinkClick r:id="rId6" tooltip="https://github.com/antonprafanto/mobile2026/blob/main/pertemuan_01_pengenalan_flutter/kode/contoh_05_aplikasi_counter_bawaan.dart"/>
           </p:cNvPr>
           <p:cNvSpPr txBox="1"/>
           <p:nvPr/>
@@ -18393,7 +18393,7 @@
                   <a:schemeClr val="bg1"/>
                 </a:solidFill>
               </a:rPr>
-              <a:t>Buka kode lengkap di GitHub  ·  05_aplikasi_counter_bawaan.dart</a:t>
+              <a:t>Buka kode lengkap di GitHub  ·  contoh_05_aplikasi_counter_bawaan.dart</a:t>
             </a:r>
             <a:endParaRPr lang="en-US" sz="1300" dirty="0"/>
           </a:p>
@@ -18402,7 +18402,7 @@
       <p:pic>
         <p:nvPicPr>
           <p:cNvPr id="40" name="Image 5" descr="ikon tautan">
-            <a:hlinkClick r:id="rId8" tooltip="https://github.com/antonprafanto/mobile2026/blob/main/pertemuan_01_pengenalan_flutter/kode/05_aplikasi_counter_bawaan.dart"/>
+            <a:hlinkClick r:id="rId8" tooltip="https://github.com/antonprafanto/mobile2026/blob/main/pertemuan_01_pengenalan_flutter/kode/contoh_05_aplikasi_counter_bawaan.dart"/>
           </p:cNvPr>
           <p:cNvPicPr>
             <a:picLocks noChangeAspect="1"/>

--- a/pertemuan_01_pengenalan_flutter/slide/PERTEMUAN_01_Pengenalan_Flutter.pptx
+++ b/pertemuan_01_pengenalan_flutter/slide/PERTEMUAN_01_Pengenalan_Flutter.pptx
@@ -133,14 +133,14 @@
   <p:extLst>
     <p:ext uri="{521415D9-36F7-43E2-AB2F-B90AF26B5E84}">
       <p14:sectionLst xmlns:p14="http://schemas.microsoft.com/office/powerpoint/2010/main">
-        <p14:section name="Pembuka" id="{9814c19b-9a5d-7374-6268-cce7746ed3af}">
+        <p14:section name="Pembuka" id="{19fde4cc-828e-ffdf-d403-1d3f92d36cb6}">
           <p14:sldIdLst>
             <p14:sldId id="256"/>
             <p14:sldId id="257"/>
             <p14:sldId id="258"/>
           </p14:sldIdLst>
         </p14:section>
-        <p14:section name="Mengenal Dunia Aplikasi Mobile" id="{f06325b5-6e22-b479-95ad-7d91b2f3a752}">
+        <p14:section name="Mengenal Dunia Aplikasi Mobile" id="{4c5d4f5c-f98f-3794-b730-852ddff5836d}">
           <p14:sldIdLst>
             <p14:sldId id="259"/>
             <p14:sldId id="260"/>
@@ -151,14 +151,14 @@
             <p14:sldId id="265"/>
           </p14:sldIdLst>
         </p14:section>
-        <p14:section name="Siklus Hidup (Lifecycle) Aplikasi" id="{2784f7d3-54dc-0bf9-96ad-73f5170ec9a7}">
+        <p14:section name="Siklus Hidup (Lifecycle) Aplikasi" id="{4c9abe5d-7ccd-5ae5-1fae-7b7c494b756e}">
           <p14:sldIdLst>
             <p14:sldId id="266"/>
             <p14:sldId id="267"/>
             <p14:sldId id="268"/>
           </p14:sldIdLst>
         </p14:section>
-        <p14:section name="Menyiapkan Alat &amp; Proyek Pertama" id="{48bdc4c2-076f-465d-5bbc-31e27d978e6a}">
+        <p14:section name="Menyiapkan Alat &amp; Proyek Pertama" id="{bece0d00-2264-a5e9-220e-7c6a697c02c3}">
           <p14:sldIdLst>
             <p14:sldId id="269"/>
             <p14:sldId id="270"/>
@@ -6653,6 +6653,64 @@
               </a:rPr>
               <a:t>late</a:t>
             </a:r>
+            <a:r>
+              <a:rPr lang="en-US" sz="1500" dirty="0">
+                <a:solidFill>
+                  <a:srgbClr val="E6EDF3"/>
+                </a:solidFill>
+                <a:latin typeface="Consolas" pitchFamily="34" charset="0"/>
+                <a:ea typeface="Consolas" pitchFamily="34" charset="-122"/>
+                <a:cs typeface="Consolas" pitchFamily="34" charset="-120"/>
+              </a:rPr>
+              <a:t> </a:t>
+            </a:r>
+            <a:r>
+              <a:rPr lang="en-US" sz="1500" dirty="0">
+                <a:solidFill>
+                  <a:srgbClr val="C792EA"/>
+                </a:solidFill>
+                <a:latin typeface="Consolas" pitchFamily="34" charset="0"/>
+                <a:ea typeface="Consolas" pitchFamily="34" charset="-122"/>
+                <a:cs typeface="Consolas" pitchFamily="34" charset="-120"/>
+              </a:rPr>
+              <a:t>final</a:t>
+            </a:r>
+            <a:r>
+              <a:rPr lang="en-US" sz="1500" dirty="0">
+                <a:solidFill>
+                  <a:srgbClr val="E6EDF3"/>
+                </a:solidFill>
+                <a:latin typeface="Consolas" pitchFamily="34" charset="0"/>
+                <a:ea typeface="Consolas" pitchFamily="34" charset="-122"/>
+                <a:cs typeface="Consolas" pitchFamily="34" charset="-120"/>
+              </a:rPr>
+              <a:t> </a:t>
+            </a:r>
+            <a:r>
+              <a:rPr lang="en-US" sz="1500" dirty="0">
+                <a:solidFill>
+                  <a:srgbClr val="FFCB6B"/>
+                </a:solidFill>
+                <a:latin typeface="Consolas" pitchFamily="34" charset="0"/>
+                <a:ea typeface="Consolas" pitchFamily="34" charset="-122"/>
+                <a:cs typeface="Consolas" pitchFamily="34" charset="-120"/>
+              </a:rPr>
+              <a:t>AppLifecycleListener</a:t>
+            </a:r>
+            <a:r>
+              <a:rPr lang="en-US" sz="1500" dirty="0">
+                <a:solidFill>
+                  <a:srgbClr val="E6EDF3"/>
+                </a:solidFill>
+                <a:latin typeface="Consolas" pitchFamily="34" charset="0"/>
+                <a:ea typeface="Consolas" pitchFamily="34" charset="-122"/>
+                <a:cs typeface="Consolas" pitchFamily="34" charset="-120"/>
+              </a:rPr>
+              <a:t> _pendengar;</a:t>
+            </a:r>
+            <a:endParaRPr lang="en-US" sz="1500" dirty="0"/>
+          </a:p>
+          <a:p>
             <a:pPr indent="0" marL="0">
               <a:lnSpc>
                 <a:spcPct val="105000"/>
@@ -6670,6 +6728,9 @@
               </a:rPr>
               <a:t> </a:t>
             </a:r>
+            <a:endParaRPr lang="en-US" sz="1500" dirty="0"/>
+          </a:p>
+          <a:p>
             <a:pPr indent="0" marL="0">
               <a:lnSpc>
                 <a:spcPct val="105000"/>
@@ -6679,14 +6740,17 @@
             <a:r>
               <a:rPr lang="en-US" sz="1500" dirty="0">
                 <a:solidFill>
-                  <a:srgbClr val="C792EA"/>
+                  <a:srgbClr val="89DDFF"/>
                 </a:solidFill>
                 <a:latin typeface="Consolas" pitchFamily="34" charset="0"/>
                 <a:ea typeface="Consolas" pitchFamily="34" charset="-122"/>
                 <a:cs typeface="Consolas" pitchFamily="34" charset="-120"/>
               </a:rPr>
-              <a:t>final</a:t>
-            </a:r>
+              <a:t>@override</a:t>
+            </a:r>
+            <a:endParaRPr lang="en-US" sz="1500" dirty="0"/>
+          </a:p>
+          <a:p>
             <a:pPr indent="0" marL="0">
               <a:lnSpc>
                 <a:spcPct val="105000"/>
@@ -6696,14 +6760,28 @@
             <a:r>
               <a:rPr lang="en-US" sz="1500" dirty="0">
                 <a:solidFill>
-                  <a:srgbClr val="E6EDF3"/>
+                  <a:srgbClr val="C792EA"/>
                 </a:solidFill>
                 <a:latin typeface="Consolas" pitchFamily="34" charset="0"/>
                 <a:ea typeface="Consolas" pitchFamily="34" charset="-122"/>
                 <a:cs typeface="Consolas" pitchFamily="34" charset="-120"/>
               </a:rPr>
-              <a:t> </a:t>
-            </a:r>
+              <a:t>void</a:t>
+            </a:r>
+            <a:r>
+              <a:rPr lang="en-US" sz="1500" dirty="0">
+                <a:solidFill>
+                  <a:srgbClr val="E6EDF3"/>
+                </a:solidFill>
+                <a:latin typeface="Consolas" pitchFamily="34" charset="0"/>
+                <a:ea typeface="Consolas" pitchFamily="34" charset="-122"/>
+                <a:cs typeface="Consolas" pitchFamily="34" charset="-120"/>
+              </a:rPr>
+              <a:t> initState() {</a:t>
+            </a:r>
+            <a:endParaRPr lang="en-US" sz="1500" dirty="0"/>
+          </a:p>
+          <a:p>
             <a:pPr indent="0" marL="0">
               <a:lnSpc>
                 <a:spcPct val="105000"/>
@@ -6713,14 +6791,39 @@
             <a:r>
               <a:rPr lang="en-US" sz="1500" dirty="0">
                 <a:solidFill>
-                  <a:srgbClr val="FFCB6B"/>
+                  <a:srgbClr val="E6EDF3"/>
                 </a:solidFill>
                 <a:latin typeface="Consolas" pitchFamily="34" charset="0"/>
                 <a:ea typeface="Consolas" pitchFamily="34" charset="-122"/>
                 <a:cs typeface="Consolas" pitchFamily="34" charset="-120"/>
               </a:rPr>
-              <a:t>AppLifecycleListener</a:t>
-            </a:r>
+              <a:t>  </a:t>
+            </a:r>
+            <a:r>
+              <a:rPr lang="en-US" sz="1500" dirty="0">
+                <a:solidFill>
+                  <a:srgbClr val="C792EA"/>
+                </a:solidFill>
+                <a:latin typeface="Consolas" pitchFamily="34" charset="0"/>
+                <a:ea typeface="Consolas" pitchFamily="34" charset="-122"/>
+                <a:cs typeface="Consolas" pitchFamily="34" charset="-120"/>
+              </a:rPr>
+              <a:t>super</a:t>
+            </a:r>
+            <a:r>
+              <a:rPr lang="en-US" sz="1500" dirty="0">
+                <a:solidFill>
+                  <a:srgbClr val="E6EDF3"/>
+                </a:solidFill>
+                <a:latin typeface="Consolas" pitchFamily="34" charset="0"/>
+                <a:ea typeface="Consolas" pitchFamily="34" charset="-122"/>
+                <a:cs typeface="Consolas" pitchFamily="34" charset="-120"/>
+              </a:rPr>
+              <a:t>.initState();</a:t>
+            </a:r>
+            <a:endParaRPr lang="en-US" sz="1500" dirty="0"/>
+          </a:p>
+          <a:p>
             <a:pPr indent="0" marL="0">
               <a:lnSpc>
                 <a:spcPct val="105000"/>
@@ -6736,7 +6839,18 @@
                 <a:ea typeface="Consolas" pitchFamily="34" charset="-122"/>
                 <a:cs typeface="Consolas" pitchFamily="34" charset="-120"/>
               </a:rPr>
-              <a:t> _pendengar;</a:t>
+              <a:t>  </a:t>
+            </a:r>
+            <a:r>
+              <a:rPr lang="en-US" sz="1500" i="1" dirty="0">
+                <a:solidFill>
+                  <a:srgbClr val="8FA3BC"/>
+                </a:solidFill>
+                <a:latin typeface="Consolas" pitchFamily="34" charset="0"/>
+                <a:ea typeface="Consolas" pitchFamily="34" charset="-122"/>
+                <a:cs typeface="Consolas" pitchFamily="34" charset="-120"/>
+              </a:rPr>
+              <a:t>// dikabari setiap kali status berubah</a:t>
             </a:r>
             <a:endParaRPr lang="en-US" sz="1500" dirty="0"/>
           </a:p>
@@ -6756,7 +6870,29 @@
                 <a:ea typeface="Consolas" pitchFamily="34" charset="-122"/>
                 <a:cs typeface="Consolas" pitchFamily="34" charset="-120"/>
               </a:rPr>
-              <a:t> </a:t>
+              <a:t>  _pendengar = </a:t>
+            </a:r>
+            <a:r>
+              <a:rPr lang="en-US" sz="1500" dirty="0">
+                <a:solidFill>
+                  <a:srgbClr val="FFCB6B"/>
+                </a:solidFill>
+                <a:latin typeface="Consolas" pitchFamily="34" charset="0"/>
+                <a:ea typeface="Consolas" pitchFamily="34" charset="-122"/>
+                <a:cs typeface="Consolas" pitchFamily="34" charset="-120"/>
+              </a:rPr>
+              <a:t>AppLifecycleListener</a:t>
+            </a:r>
+            <a:r>
+              <a:rPr lang="en-US" sz="1500" dirty="0">
+                <a:solidFill>
+                  <a:srgbClr val="E6EDF3"/>
+                </a:solidFill>
+                <a:latin typeface="Consolas" pitchFamily="34" charset="0"/>
+                <a:ea typeface="Consolas" pitchFamily="34" charset="-122"/>
+                <a:cs typeface="Consolas" pitchFamily="34" charset="-120"/>
+              </a:rPr>
+              <a:t>(</a:t>
             </a:r>
             <a:endParaRPr lang="en-US" sz="1500" dirty="0"/>
           </a:p>
@@ -6770,13 +6906,13 @@
             <a:r>
               <a:rPr lang="en-US" sz="1500" dirty="0">
                 <a:solidFill>
-                  <a:srgbClr val="89DDFF"/>
+                  <a:srgbClr val="E6EDF3"/>
                 </a:solidFill>
                 <a:latin typeface="Consolas" pitchFamily="34" charset="0"/>
                 <a:ea typeface="Consolas" pitchFamily="34" charset="-122"/>
                 <a:cs typeface="Consolas" pitchFamily="34" charset="-120"/>
               </a:rPr>
-              <a:t>@override</a:t>
+              <a:t>    onStateChange: _catatStatus,</a:t>
             </a:r>
             <a:endParaRPr lang="en-US" sz="1500" dirty="0"/>
           </a:p>
@@ -6790,14 +6926,17 @@
             <a:r>
               <a:rPr lang="en-US" sz="1500" dirty="0">
                 <a:solidFill>
-                  <a:srgbClr val="C792EA"/>
+                  <a:srgbClr val="E6EDF3"/>
                 </a:solidFill>
                 <a:latin typeface="Consolas" pitchFamily="34" charset="0"/>
                 <a:ea typeface="Consolas" pitchFamily="34" charset="-122"/>
                 <a:cs typeface="Consolas" pitchFamily="34" charset="-120"/>
               </a:rPr>
-              <a:t>void</a:t>
-            </a:r>
+              <a:t>  );</a:t>
+            </a:r>
+            <a:endParaRPr lang="en-US" sz="1500" dirty="0"/>
+          </a:p>
+          <a:p>
             <a:pPr indent="0" marL="0">
               <a:lnSpc>
                 <a:spcPct val="105000"/>
@@ -6813,7 +6952,7 @@
                 <a:ea typeface="Consolas" pitchFamily="34" charset="-122"/>
                 <a:cs typeface="Consolas" pitchFamily="34" charset="-120"/>
               </a:rPr>
-              <a:t> initState() {</a:t>
+              <a:t>}</a:t>
             </a:r>
             <a:endParaRPr lang="en-US" sz="1500" dirty="0"/>
           </a:p>
@@ -6833,8 +6972,11 @@
                 <a:ea typeface="Consolas" pitchFamily="34" charset="-122"/>
                 <a:cs typeface="Consolas" pitchFamily="34" charset="-120"/>
               </a:rPr>
-              <a:t>  </a:t>
-            </a:r>
+              <a:t> </a:t>
+            </a:r>
+            <a:endParaRPr lang="en-US" sz="1500" dirty="0"/>
+          </a:p>
+          <a:p>
             <a:pPr indent="0" marL="0">
               <a:lnSpc>
                 <a:spcPct val="105000"/>
@@ -6844,14 +6986,17 @@
             <a:r>
               <a:rPr lang="en-US" sz="1500" dirty="0">
                 <a:solidFill>
-                  <a:srgbClr val="C792EA"/>
+                  <a:srgbClr val="89DDFF"/>
                 </a:solidFill>
                 <a:latin typeface="Consolas" pitchFamily="34" charset="0"/>
                 <a:ea typeface="Consolas" pitchFamily="34" charset="-122"/>
                 <a:cs typeface="Consolas" pitchFamily="34" charset="-120"/>
               </a:rPr>
-              <a:t>super</a:t>
-            </a:r>
+              <a:t>@override</a:t>
+            </a:r>
+            <a:endParaRPr lang="en-US" sz="1500" dirty="0"/>
+          </a:p>
+          <a:p>
             <a:pPr indent="0" marL="0">
               <a:lnSpc>
                 <a:spcPct val="105000"/>
@@ -6861,13 +7006,24 @@
             <a:r>
               <a:rPr lang="en-US" sz="1500" dirty="0">
                 <a:solidFill>
-                  <a:srgbClr val="E6EDF3"/>
+                  <a:srgbClr val="C792EA"/>
                 </a:solidFill>
                 <a:latin typeface="Consolas" pitchFamily="34" charset="0"/>
                 <a:ea typeface="Consolas" pitchFamily="34" charset="-122"/>
                 <a:cs typeface="Consolas" pitchFamily="34" charset="-120"/>
               </a:rPr>
-              <a:t>.initState();</a:t>
+              <a:t>void</a:t>
+            </a:r>
+            <a:r>
+              <a:rPr lang="en-US" sz="1500" dirty="0">
+                <a:solidFill>
+                  <a:srgbClr val="E6EDF3"/>
+                </a:solidFill>
+                <a:latin typeface="Consolas" pitchFamily="34" charset="0"/>
+                <a:ea typeface="Consolas" pitchFamily="34" charset="-122"/>
+                <a:cs typeface="Consolas" pitchFamily="34" charset="-120"/>
+              </a:rPr>
+              <a:t> dispose() {</a:t>
             </a:r>
             <a:endParaRPr lang="en-US" sz="1500" dirty="0"/>
           </a:p>
@@ -6887,8 +7043,22 @@
                 <a:ea typeface="Consolas" pitchFamily="34" charset="-122"/>
                 <a:cs typeface="Consolas" pitchFamily="34" charset="-120"/>
               </a:rPr>
-              <a:t>  </a:t>
-            </a:r>
+              <a:t>  _pendengar.dispose(); </a:t>
+            </a:r>
+            <a:r>
+              <a:rPr lang="en-US" sz="1500" i="1" dirty="0">
+                <a:solidFill>
+                  <a:srgbClr val="8FA3BC"/>
+                </a:solidFill>
+                <a:latin typeface="Consolas" pitchFamily="34" charset="0"/>
+                <a:ea typeface="Consolas" pitchFamily="34" charset="-122"/>
+                <a:cs typeface="Consolas" pitchFamily="34" charset="-120"/>
+              </a:rPr>
+              <a:t>// WAJIB: cegah bocor memori</a:t>
+            </a:r>
+            <a:endParaRPr lang="en-US" sz="1500" dirty="0"/>
+          </a:p>
+          <a:p>
             <a:pPr indent="0" marL="0">
               <a:lnSpc>
                 <a:spcPct val="105000"/>
@@ -6896,287 +7066,27 @@
               <a:buNone/>
             </a:pPr>
             <a:r>
-              <a:rPr lang="en-US" sz="1500" i="1" dirty="0">
-                <a:solidFill>
-                  <a:srgbClr val="8FA3BC"/>
+              <a:rPr lang="en-US" sz="1500" dirty="0">
+                <a:solidFill>
+                  <a:srgbClr val="E6EDF3"/>
                 </a:solidFill>
                 <a:latin typeface="Consolas" pitchFamily="34" charset="0"/>
                 <a:ea typeface="Consolas" pitchFamily="34" charset="-122"/>
                 <a:cs typeface="Consolas" pitchFamily="34" charset="-120"/>
               </a:rPr>
-              <a:t>// dikabari setiap kali status berubah</a:t>
-            </a:r>
-            <a:endParaRPr lang="en-US" sz="1500" dirty="0"/>
-          </a:p>
-          <a:p>
-            <a:pPr indent="0" marL="0">
-              <a:lnSpc>
-                <a:spcPct val="105000"/>
-              </a:lnSpc>
-              <a:buNone/>
-            </a:pPr>
+              <a:t>  </a:t>
+            </a:r>
             <a:r>
               <a:rPr lang="en-US" sz="1500" dirty="0">
                 <a:solidFill>
-                  <a:srgbClr val="E6EDF3"/>
+                  <a:srgbClr val="C792EA"/>
                 </a:solidFill>
                 <a:latin typeface="Consolas" pitchFamily="34" charset="0"/>
                 <a:ea typeface="Consolas" pitchFamily="34" charset="-122"/>
                 <a:cs typeface="Consolas" pitchFamily="34" charset="-120"/>
               </a:rPr>
-              <a:t>  _pendengar = </a:t>
-            </a:r>
-            <a:pPr indent="0" marL="0">
-              <a:lnSpc>
-                <a:spcPct val="105000"/>
-              </a:lnSpc>
-              <a:buNone/>
-            </a:pPr>
-            <a:r>
-              <a:rPr lang="en-US" sz="1500" dirty="0">
-                <a:solidFill>
-                  <a:srgbClr val="FFCB6B"/>
-                </a:solidFill>
-                <a:latin typeface="Consolas" pitchFamily="34" charset="0"/>
-                <a:ea typeface="Consolas" pitchFamily="34" charset="-122"/>
-                <a:cs typeface="Consolas" pitchFamily="34" charset="-120"/>
-              </a:rPr>
-              <a:t>AppLifecycleListener</a:t>
-            </a:r>
-            <a:pPr indent="0" marL="0">
-              <a:lnSpc>
-                <a:spcPct val="105000"/>
-              </a:lnSpc>
-              <a:buNone/>
-            </a:pPr>
-            <a:r>
-              <a:rPr lang="en-US" sz="1500" dirty="0">
-                <a:solidFill>
-                  <a:srgbClr val="E6EDF3"/>
-                </a:solidFill>
-                <a:latin typeface="Consolas" pitchFamily="34" charset="0"/>
-                <a:ea typeface="Consolas" pitchFamily="34" charset="-122"/>
-                <a:cs typeface="Consolas" pitchFamily="34" charset="-120"/>
-              </a:rPr>
-              <a:t>(</a:t>
-            </a:r>
-            <a:endParaRPr lang="en-US" sz="1500" dirty="0"/>
-          </a:p>
-          <a:p>
-            <a:pPr indent="0" marL="0">
-              <a:lnSpc>
-                <a:spcPct val="105000"/>
-              </a:lnSpc>
-              <a:buNone/>
-            </a:pPr>
-            <a:r>
-              <a:rPr lang="en-US" sz="1500" dirty="0">
-                <a:solidFill>
-                  <a:srgbClr val="E6EDF3"/>
-                </a:solidFill>
-                <a:latin typeface="Consolas" pitchFamily="34" charset="0"/>
-                <a:ea typeface="Consolas" pitchFamily="34" charset="-122"/>
-                <a:cs typeface="Consolas" pitchFamily="34" charset="-120"/>
-              </a:rPr>
-              <a:t>    onStateChange: _catatStatus,</a:t>
-            </a:r>
-            <a:endParaRPr lang="en-US" sz="1500" dirty="0"/>
-          </a:p>
-          <a:p>
-            <a:pPr indent="0" marL="0">
-              <a:lnSpc>
-                <a:spcPct val="105000"/>
-              </a:lnSpc>
-              <a:buNone/>
-            </a:pPr>
-            <a:r>
-              <a:rPr lang="en-US" sz="1500" dirty="0">
-                <a:solidFill>
-                  <a:srgbClr val="E6EDF3"/>
-                </a:solidFill>
-                <a:latin typeface="Consolas" pitchFamily="34" charset="0"/>
-                <a:ea typeface="Consolas" pitchFamily="34" charset="-122"/>
-                <a:cs typeface="Consolas" pitchFamily="34" charset="-120"/>
-              </a:rPr>
-              <a:t>  );</a:t>
-            </a:r>
-            <a:endParaRPr lang="en-US" sz="1500" dirty="0"/>
-          </a:p>
-          <a:p>
-            <a:pPr indent="0" marL="0">
-              <a:lnSpc>
-                <a:spcPct val="105000"/>
-              </a:lnSpc>
-              <a:buNone/>
-            </a:pPr>
-            <a:r>
-              <a:rPr lang="en-US" sz="1500" dirty="0">
-                <a:solidFill>
-                  <a:srgbClr val="E6EDF3"/>
-                </a:solidFill>
-                <a:latin typeface="Consolas" pitchFamily="34" charset="0"/>
-                <a:ea typeface="Consolas" pitchFamily="34" charset="-122"/>
-                <a:cs typeface="Consolas" pitchFamily="34" charset="-120"/>
-              </a:rPr>
-              <a:t>}</a:t>
-            </a:r>
-            <a:endParaRPr lang="en-US" sz="1500" dirty="0"/>
-          </a:p>
-          <a:p>
-            <a:pPr indent="0" marL="0">
-              <a:lnSpc>
-                <a:spcPct val="105000"/>
-              </a:lnSpc>
-              <a:buNone/>
-            </a:pPr>
-            <a:r>
-              <a:rPr lang="en-US" sz="1500" dirty="0">
-                <a:solidFill>
-                  <a:srgbClr val="E6EDF3"/>
-                </a:solidFill>
-                <a:latin typeface="Consolas" pitchFamily="34" charset="0"/>
-                <a:ea typeface="Consolas" pitchFamily="34" charset="-122"/>
-                <a:cs typeface="Consolas" pitchFamily="34" charset="-120"/>
-              </a:rPr>
-              <a:t> </a:t>
-            </a:r>
-            <a:endParaRPr lang="en-US" sz="1500" dirty="0"/>
-          </a:p>
-          <a:p>
-            <a:pPr indent="0" marL="0">
-              <a:lnSpc>
-                <a:spcPct val="105000"/>
-              </a:lnSpc>
-              <a:buNone/>
-            </a:pPr>
-            <a:r>
-              <a:rPr lang="en-US" sz="1500" dirty="0">
-                <a:solidFill>
-                  <a:srgbClr val="89DDFF"/>
-                </a:solidFill>
-                <a:latin typeface="Consolas" pitchFamily="34" charset="0"/>
-                <a:ea typeface="Consolas" pitchFamily="34" charset="-122"/>
-                <a:cs typeface="Consolas" pitchFamily="34" charset="-120"/>
-              </a:rPr>
-              <a:t>@override</a:t>
-            </a:r>
-            <a:endParaRPr lang="en-US" sz="1500" dirty="0"/>
-          </a:p>
-          <a:p>
-            <a:pPr indent="0" marL="0">
-              <a:lnSpc>
-                <a:spcPct val="105000"/>
-              </a:lnSpc>
-              <a:buNone/>
-            </a:pPr>
-            <a:r>
-              <a:rPr lang="en-US" sz="1500" dirty="0">
-                <a:solidFill>
-                  <a:srgbClr val="C792EA"/>
-                </a:solidFill>
-                <a:latin typeface="Consolas" pitchFamily="34" charset="0"/>
-                <a:ea typeface="Consolas" pitchFamily="34" charset="-122"/>
-                <a:cs typeface="Consolas" pitchFamily="34" charset="-120"/>
-              </a:rPr>
-              <a:t>void</a:t>
-            </a:r>
-            <a:pPr indent="0" marL="0">
-              <a:lnSpc>
-                <a:spcPct val="105000"/>
-              </a:lnSpc>
-              <a:buNone/>
-            </a:pPr>
-            <a:r>
-              <a:rPr lang="en-US" sz="1500" dirty="0">
-                <a:solidFill>
-                  <a:srgbClr val="E6EDF3"/>
-                </a:solidFill>
-                <a:latin typeface="Consolas" pitchFamily="34" charset="0"/>
-                <a:ea typeface="Consolas" pitchFamily="34" charset="-122"/>
-                <a:cs typeface="Consolas" pitchFamily="34" charset="-120"/>
-              </a:rPr>
-              <a:t> dispose() {</a:t>
-            </a:r>
-            <a:endParaRPr lang="en-US" sz="1500" dirty="0"/>
-          </a:p>
-          <a:p>
-            <a:pPr indent="0" marL="0">
-              <a:lnSpc>
-                <a:spcPct val="105000"/>
-              </a:lnSpc>
-              <a:buNone/>
-            </a:pPr>
-            <a:r>
-              <a:rPr lang="en-US" sz="1500" dirty="0">
-                <a:solidFill>
-                  <a:srgbClr val="E6EDF3"/>
-                </a:solidFill>
-                <a:latin typeface="Consolas" pitchFamily="34" charset="0"/>
-                <a:ea typeface="Consolas" pitchFamily="34" charset="-122"/>
-                <a:cs typeface="Consolas" pitchFamily="34" charset="-120"/>
-              </a:rPr>
-              <a:t>  _pendengar.dispose(); </a:t>
-            </a:r>
-            <a:pPr indent="0" marL="0">
-              <a:lnSpc>
-                <a:spcPct val="105000"/>
-              </a:lnSpc>
-              <a:buNone/>
-            </a:pPr>
-            <a:r>
-              <a:rPr lang="en-US" sz="1500" i="1" dirty="0">
-                <a:solidFill>
-                  <a:srgbClr val="8FA3BC"/>
-                </a:solidFill>
-                <a:latin typeface="Consolas" pitchFamily="34" charset="0"/>
-                <a:ea typeface="Consolas" pitchFamily="34" charset="-122"/>
-                <a:cs typeface="Consolas" pitchFamily="34" charset="-120"/>
-              </a:rPr>
-              <a:t>// WAJIB: cegah bocor memori</a:t>
-            </a:r>
-            <a:endParaRPr lang="en-US" sz="1500" dirty="0"/>
-          </a:p>
-          <a:p>
-            <a:pPr indent="0" marL="0">
-              <a:lnSpc>
-                <a:spcPct val="105000"/>
-              </a:lnSpc>
-              <a:buNone/>
-            </a:pPr>
-            <a:r>
-              <a:rPr lang="en-US" sz="1500" dirty="0">
-                <a:solidFill>
-                  <a:srgbClr val="E6EDF3"/>
-                </a:solidFill>
-                <a:latin typeface="Consolas" pitchFamily="34" charset="0"/>
-                <a:ea typeface="Consolas" pitchFamily="34" charset="-122"/>
-                <a:cs typeface="Consolas" pitchFamily="34" charset="-120"/>
-              </a:rPr>
-              <a:t>  </a:t>
-            </a:r>
-            <a:pPr indent="0" marL="0">
-              <a:lnSpc>
-                <a:spcPct val="105000"/>
-              </a:lnSpc>
-              <a:buNone/>
-            </a:pPr>
-            <a:r>
-              <a:rPr lang="en-US" sz="1500" dirty="0">
-                <a:solidFill>
-                  <a:srgbClr val="C792EA"/>
-                </a:solidFill>
-                <a:latin typeface="Consolas" pitchFamily="34" charset="0"/>
-                <a:ea typeface="Consolas" pitchFamily="34" charset="-122"/>
-                <a:cs typeface="Consolas" pitchFamily="34" charset="-120"/>
-              </a:rPr>
               <a:t>super</a:t>
             </a:r>
-            <a:pPr indent="0" marL="0">
-              <a:lnSpc>
-                <a:spcPct val="105000"/>
-              </a:lnSpc>
-              <a:buNone/>
-            </a:pPr>
             <a:r>
               <a:rPr lang="en-US" sz="1500" dirty="0">
                 <a:solidFill>
@@ -12786,6 +12696,42 @@
               </a:rPr>
               <a:t>import</a:t>
             </a:r>
+            <a:r>
+              <a:rPr lang="en-US" sz="1500" dirty="0">
+                <a:solidFill>
+                  <a:srgbClr val="E6EDF3"/>
+                </a:solidFill>
+                <a:latin typeface="Consolas" pitchFamily="34" charset="0"/>
+                <a:ea typeface="Consolas" pitchFamily="34" charset="-122"/>
+                <a:cs typeface="Consolas" pitchFamily="34" charset="-120"/>
+              </a:rPr>
+              <a:t> </a:t>
+            </a:r>
+            <a:r>
+              <a:rPr lang="en-US" sz="1500" dirty="0">
+                <a:solidFill>
+                  <a:srgbClr val="C3E88D"/>
+                </a:solidFill>
+                <a:latin typeface="Consolas" pitchFamily="34" charset="0"/>
+                <a:ea typeface="Consolas" pitchFamily="34" charset="-122"/>
+                <a:cs typeface="Consolas" pitchFamily="34" charset="-120"/>
+              </a:rPr>
+              <a:t>'package:flutter/material.dart'</a:t>
+            </a:r>
+            <a:r>
+              <a:rPr lang="en-US" sz="1500" dirty="0">
+                <a:solidFill>
+                  <a:srgbClr val="E6EDF3"/>
+                </a:solidFill>
+                <a:latin typeface="Consolas" pitchFamily="34" charset="0"/>
+                <a:ea typeface="Consolas" pitchFamily="34" charset="-122"/>
+                <a:cs typeface="Consolas" pitchFamily="34" charset="-120"/>
+              </a:rPr>
+              <a:t>;</a:t>
+            </a:r>
+            <a:endParaRPr lang="en-US" sz="1500" dirty="0"/>
+          </a:p>
+          <a:p>
             <a:pPr indent="0" marL="0">
               <a:lnSpc>
                 <a:spcPct val="105000"/>
@@ -12803,6 +12749,9 @@
               </a:rPr>
               <a:t> </a:t>
             </a:r>
+            <a:endParaRPr lang="en-US" sz="1500" dirty="0"/>
+          </a:p>
+          <a:p>
             <a:pPr indent="0" marL="0">
               <a:lnSpc>
                 <a:spcPct val="105000"/>
@@ -12812,14 +12761,28 @@
             <a:r>
               <a:rPr lang="en-US" sz="1500" dirty="0">
                 <a:solidFill>
-                  <a:srgbClr val="C3E88D"/>
+                  <a:srgbClr val="C792EA"/>
                 </a:solidFill>
                 <a:latin typeface="Consolas" pitchFamily="34" charset="0"/>
                 <a:ea typeface="Consolas" pitchFamily="34" charset="-122"/>
                 <a:cs typeface="Consolas" pitchFamily="34" charset="-120"/>
               </a:rPr>
-              <a:t>'package:flutter/material.dart'</a:t>
-            </a:r>
+              <a:t>void</a:t>
+            </a:r>
+            <a:r>
+              <a:rPr lang="en-US" sz="1500" dirty="0">
+                <a:solidFill>
+                  <a:srgbClr val="E6EDF3"/>
+                </a:solidFill>
+                <a:latin typeface="Consolas" pitchFamily="34" charset="0"/>
+                <a:ea typeface="Consolas" pitchFamily="34" charset="-122"/>
+                <a:cs typeface="Consolas" pitchFamily="34" charset="-120"/>
+              </a:rPr>
+              <a:t> main() {</a:t>
+            </a:r>
+            <a:endParaRPr lang="en-US" sz="1500" dirty="0"/>
+          </a:p>
+          <a:p>
             <a:pPr indent="0" marL="0">
               <a:lnSpc>
                 <a:spcPct val="105000"/>
@@ -12835,7 +12798,7 @@
                 <a:ea typeface="Consolas" pitchFamily="34" charset="-122"/>
                 <a:cs typeface="Consolas" pitchFamily="34" charset="-120"/>
               </a:rPr>
-              <a:t>;</a:t>
+              <a:t>  runApp(</a:t>
             </a:r>
             <a:endParaRPr lang="en-US" sz="1500" dirty="0"/>
           </a:p>
@@ -12855,7 +12818,51 @@
                 <a:ea typeface="Consolas" pitchFamily="34" charset="-122"/>
                 <a:cs typeface="Consolas" pitchFamily="34" charset="-120"/>
               </a:rPr>
+              <a:t>    </a:t>
+            </a:r>
+            <a:r>
+              <a:rPr lang="en-US" sz="1500" dirty="0">
+                <a:solidFill>
+                  <a:srgbClr val="C792EA"/>
+                </a:solidFill>
+                <a:latin typeface="Consolas" pitchFamily="34" charset="0"/>
+                <a:ea typeface="Consolas" pitchFamily="34" charset="-122"/>
+                <a:cs typeface="Consolas" pitchFamily="34" charset="-120"/>
+              </a:rPr>
+              <a:t>const</a:t>
+            </a:r>
+            <a:r>
+              <a:rPr lang="en-US" sz="1500" dirty="0">
+                <a:solidFill>
+                  <a:srgbClr val="E6EDF3"/>
+                </a:solidFill>
+                <a:latin typeface="Consolas" pitchFamily="34" charset="0"/>
+                <a:ea typeface="Consolas" pitchFamily="34" charset="-122"/>
+                <a:cs typeface="Consolas" pitchFamily="34" charset="-120"/>
+              </a:rPr>
               <a:t> </a:t>
+            </a:r>
+            <a:r>
+              <a:rPr lang="en-US" sz="1500" dirty="0">
+                <a:solidFill>
+                  <a:srgbClr val="FFCB6B"/>
+                </a:solidFill>
+                <a:latin typeface="Consolas" pitchFamily="34" charset="0"/>
+                <a:ea typeface="Consolas" pitchFamily="34" charset="-122"/>
+                <a:cs typeface="Consolas" pitchFamily="34" charset="-120"/>
+              </a:rPr>
+              <a:t>Center</a:t>
+            </a:r>
+            <a:r>
+              <a:rPr lang="en-US" sz="1500" dirty="0">
+                <a:solidFill>
+                  <a:srgbClr val="E6EDF3"/>
+                </a:solidFill>
+                <a:latin typeface="Consolas" pitchFamily="34" charset="0"/>
+                <a:ea typeface="Consolas" pitchFamily="34" charset="-122"/>
+                <a:cs typeface="Consolas" pitchFamily="34" charset="-120"/>
+              </a:rPr>
+              <a:t>(</a:t>
             </a:r>
             <a:endParaRPr lang="en-US" sz="1500" dirty="0"/>
           </a:p>
@@ -12869,14 +12876,39 @@
             <a:r>
               <a:rPr lang="en-US" sz="1500" dirty="0">
                 <a:solidFill>
-                  <a:srgbClr val="C792EA"/>
+                  <a:srgbClr val="E6EDF3"/>
                 </a:solidFill>
                 <a:latin typeface="Consolas" pitchFamily="34" charset="0"/>
                 <a:ea typeface="Consolas" pitchFamily="34" charset="-122"/>
                 <a:cs typeface="Consolas" pitchFamily="34" charset="-120"/>
               </a:rPr>
-              <a:t>void</a:t>
-            </a:r>
+              <a:t>      child: </a:t>
+            </a:r>
+            <a:r>
+              <a:rPr lang="en-US" sz="1500" dirty="0">
+                <a:solidFill>
+                  <a:srgbClr val="FFCB6B"/>
+                </a:solidFill>
+                <a:latin typeface="Consolas" pitchFamily="34" charset="0"/>
+                <a:ea typeface="Consolas" pitchFamily="34" charset="-122"/>
+                <a:cs typeface="Consolas" pitchFamily="34" charset="-120"/>
+              </a:rPr>
+              <a:t>Text</a:t>
+            </a:r>
+            <a:r>
+              <a:rPr lang="en-US" sz="1500" dirty="0">
+                <a:solidFill>
+                  <a:srgbClr val="E6EDF3"/>
+                </a:solidFill>
+                <a:latin typeface="Consolas" pitchFamily="34" charset="0"/>
+                <a:ea typeface="Consolas" pitchFamily="34" charset="-122"/>
+                <a:cs typeface="Consolas" pitchFamily="34" charset="-120"/>
+              </a:rPr>
+              <a:t>(</a:t>
+            </a:r>
+            <a:endParaRPr lang="en-US" sz="1500" dirty="0"/>
+          </a:p>
+          <a:p>
             <a:pPr indent="0" marL="0">
               <a:lnSpc>
                 <a:spcPct val="105000"/>
@@ -12892,7 +12924,29 @@
                 <a:ea typeface="Consolas" pitchFamily="34" charset="-122"/>
                 <a:cs typeface="Consolas" pitchFamily="34" charset="-120"/>
               </a:rPr>
-              <a:t> main() {</a:t>
+              <a:t>        </a:t>
+            </a:r>
+            <a:r>
+              <a:rPr lang="en-US" sz="1500" dirty="0">
+                <a:solidFill>
+                  <a:srgbClr val="C3E88D"/>
+                </a:solidFill>
+                <a:latin typeface="Consolas" pitchFamily="34" charset="0"/>
+                <a:ea typeface="Consolas" pitchFamily="34" charset="-122"/>
+                <a:cs typeface="Consolas" pitchFamily="34" charset="-120"/>
+              </a:rPr>
+              <a:t>'Halo, Dunia Flutter!'</a:t>
+            </a:r>
+            <a:r>
+              <a:rPr lang="en-US" sz="1500" dirty="0">
+                <a:solidFill>
+                  <a:srgbClr val="E6EDF3"/>
+                </a:solidFill>
+                <a:latin typeface="Consolas" pitchFamily="34" charset="0"/>
+                <a:ea typeface="Consolas" pitchFamily="34" charset="-122"/>
+                <a:cs typeface="Consolas" pitchFamily="34" charset="-120"/>
+              </a:rPr>
+              <a:t>,</a:t>
             </a:r>
             <a:endParaRPr lang="en-US" sz="1500" dirty="0"/>
           </a:p>
@@ -12912,7 +12966,29 @@
                 <a:ea typeface="Consolas" pitchFamily="34" charset="-122"/>
                 <a:cs typeface="Consolas" pitchFamily="34" charset="-120"/>
               </a:rPr>
-              <a:t>  runApp(</a:t>
+              <a:t>        textDirection: </a:t>
+            </a:r>
+            <a:r>
+              <a:rPr lang="en-US" sz="1500" dirty="0">
+                <a:solidFill>
+                  <a:srgbClr val="FFCB6B"/>
+                </a:solidFill>
+                <a:latin typeface="Consolas" pitchFamily="34" charset="0"/>
+                <a:ea typeface="Consolas" pitchFamily="34" charset="-122"/>
+                <a:cs typeface="Consolas" pitchFamily="34" charset="-120"/>
+              </a:rPr>
+              <a:t>TextDirection</a:t>
+            </a:r>
+            <a:r>
+              <a:rPr lang="en-US" sz="1500" dirty="0">
+                <a:solidFill>
+                  <a:srgbClr val="E6EDF3"/>
+                </a:solidFill>
+                <a:latin typeface="Consolas" pitchFamily="34" charset="0"/>
+                <a:ea typeface="Consolas" pitchFamily="34" charset="-122"/>
+                <a:cs typeface="Consolas" pitchFamily="34" charset="-120"/>
+              </a:rPr>
+              <a:t>.ltr,</a:t>
             </a:r>
             <a:endParaRPr lang="en-US" sz="1500" dirty="0"/>
           </a:p>
@@ -12932,31 +13008,19 @@
                 <a:ea typeface="Consolas" pitchFamily="34" charset="-122"/>
                 <a:cs typeface="Consolas" pitchFamily="34" charset="-120"/>
               </a:rPr>
-              <a:t>    </a:t>
-            </a:r>
-            <a:pPr indent="0" marL="0">
-              <a:lnSpc>
-                <a:spcPct val="105000"/>
-              </a:lnSpc>
-              <a:buNone/>
-            </a:pPr>
+              <a:t>        style: </a:t>
+            </a:r>
             <a:r>
               <a:rPr lang="en-US" sz="1500" dirty="0">
                 <a:solidFill>
-                  <a:srgbClr val="C792EA"/>
+                  <a:srgbClr val="FFCB6B"/>
                 </a:solidFill>
                 <a:latin typeface="Consolas" pitchFamily="34" charset="0"/>
                 <a:ea typeface="Consolas" pitchFamily="34" charset="-122"/>
                 <a:cs typeface="Consolas" pitchFamily="34" charset="-120"/>
               </a:rPr>
-              <a:t>const</a:t>
-            </a:r>
-            <a:pPr indent="0" marL="0">
-              <a:lnSpc>
-                <a:spcPct val="105000"/>
-              </a:lnSpc>
-              <a:buNone/>
-            </a:pPr>
+              <a:t>TextStyle</a:t>
+            </a:r>
             <a:r>
               <a:rPr lang="en-US" sz="1500" dirty="0">
                 <a:solidFill>
@@ -12966,281 +13030,19 @@
                 <a:ea typeface="Consolas" pitchFamily="34" charset="-122"/>
                 <a:cs typeface="Consolas" pitchFamily="34" charset="-120"/>
               </a:rPr>
-              <a:t> </a:t>
-            </a:r>
-            <a:pPr indent="0" marL="0">
-              <a:lnSpc>
-                <a:spcPct val="105000"/>
-              </a:lnSpc>
-              <a:buNone/>
-            </a:pPr>
+              <a:t>(fontSize: </a:t>
+            </a:r>
             <a:r>
               <a:rPr lang="en-US" sz="1500" dirty="0">
                 <a:solidFill>
-                  <a:srgbClr val="FFCB6B"/>
+                  <a:srgbClr val="F78C6C"/>
                 </a:solidFill>
                 <a:latin typeface="Consolas" pitchFamily="34" charset="0"/>
                 <a:ea typeface="Consolas" pitchFamily="34" charset="-122"/>
                 <a:cs typeface="Consolas" pitchFamily="34" charset="-120"/>
               </a:rPr>
-              <a:t>Center</a:t>
-            </a:r>
-            <a:pPr indent="0" marL="0">
-              <a:lnSpc>
-                <a:spcPct val="105000"/>
-              </a:lnSpc>
-              <a:buNone/>
-            </a:pPr>
-            <a:r>
-              <a:rPr lang="en-US" sz="1500" dirty="0">
-                <a:solidFill>
-                  <a:srgbClr val="E6EDF3"/>
-                </a:solidFill>
-                <a:latin typeface="Consolas" pitchFamily="34" charset="0"/>
-                <a:ea typeface="Consolas" pitchFamily="34" charset="-122"/>
-                <a:cs typeface="Consolas" pitchFamily="34" charset="-120"/>
-              </a:rPr>
-              <a:t>(</a:t>
-            </a:r>
-            <a:endParaRPr lang="en-US" sz="1500" dirty="0"/>
-          </a:p>
-          <a:p>
-            <a:pPr indent="0" marL="0">
-              <a:lnSpc>
-                <a:spcPct val="105000"/>
-              </a:lnSpc>
-              <a:buNone/>
-            </a:pPr>
-            <a:r>
-              <a:rPr lang="en-US" sz="1500" dirty="0">
-                <a:solidFill>
-                  <a:srgbClr val="E6EDF3"/>
-                </a:solidFill>
-                <a:latin typeface="Consolas" pitchFamily="34" charset="0"/>
-                <a:ea typeface="Consolas" pitchFamily="34" charset="-122"/>
-                <a:cs typeface="Consolas" pitchFamily="34" charset="-120"/>
-              </a:rPr>
-              <a:t>      child: </a:t>
-            </a:r>
-            <a:pPr indent="0" marL="0">
-              <a:lnSpc>
-                <a:spcPct val="105000"/>
-              </a:lnSpc>
-              <a:buNone/>
-            </a:pPr>
-            <a:r>
-              <a:rPr lang="en-US" sz="1500" dirty="0">
-                <a:solidFill>
-                  <a:srgbClr val="FFCB6B"/>
-                </a:solidFill>
-                <a:latin typeface="Consolas" pitchFamily="34" charset="0"/>
-                <a:ea typeface="Consolas" pitchFamily="34" charset="-122"/>
-                <a:cs typeface="Consolas" pitchFamily="34" charset="-120"/>
-              </a:rPr>
-              <a:t>Text</a:t>
-            </a:r>
-            <a:pPr indent="0" marL="0">
-              <a:lnSpc>
-                <a:spcPct val="105000"/>
-              </a:lnSpc>
-              <a:buNone/>
-            </a:pPr>
-            <a:r>
-              <a:rPr lang="en-US" sz="1500" dirty="0">
-                <a:solidFill>
-                  <a:srgbClr val="E6EDF3"/>
-                </a:solidFill>
-                <a:latin typeface="Consolas" pitchFamily="34" charset="0"/>
-                <a:ea typeface="Consolas" pitchFamily="34" charset="-122"/>
-                <a:cs typeface="Consolas" pitchFamily="34" charset="-120"/>
-              </a:rPr>
-              <a:t>(</a:t>
-            </a:r>
-            <a:endParaRPr lang="en-US" sz="1500" dirty="0"/>
-          </a:p>
-          <a:p>
-            <a:pPr indent="0" marL="0">
-              <a:lnSpc>
-                <a:spcPct val="105000"/>
-              </a:lnSpc>
-              <a:buNone/>
-            </a:pPr>
-            <a:r>
-              <a:rPr lang="en-US" sz="1500" dirty="0">
-                <a:solidFill>
-                  <a:srgbClr val="E6EDF3"/>
-                </a:solidFill>
-                <a:latin typeface="Consolas" pitchFamily="34" charset="0"/>
-                <a:ea typeface="Consolas" pitchFamily="34" charset="-122"/>
-                <a:cs typeface="Consolas" pitchFamily="34" charset="-120"/>
-              </a:rPr>
-              <a:t>        </a:t>
-            </a:r>
-            <a:pPr indent="0" marL="0">
-              <a:lnSpc>
-                <a:spcPct val="105000"/>
-              </a:lnSpc>
-              <a:buNone/>
-            </a:pPr>
-            <a:r>
-              <a:rPr lang="en-US" sz="1500" dirty="0">
-                <a:solidFill>
-                  <a:srgbClr val="C3E88D"/>
-                </a:solidFill>
-                <a:latin typeface="Consolas" pitchFamily="34" charset="0"/>
-                <a:ea typeface="Consolas" pitchFamily="34" charset="-122"/>
-                <a:cs typeface="Consolas" pitchFamily="34" charset="-120"/>
-              </a:rPr>
-              <a:t>'Halo, Dunia Flutter!'</a:t>
-            </a:r>
-            <a:pPr indent="0" marL="0">
-              <a:lnSpc>
-                <a:spcPct val="105000"/>
-              </a:lnSpc>
-              <a:buNone/>
-            </a:pPr>
-            <a:r>
-              <a:rPr lang="en-US" sz="1500" dirty="0">
-                <a:solidFill>
-                  <a:srgbClr val="E6EDF3"/>
-                </a:solidFill>
-                <a:latin typeface="Consolas" pitchFamily="34" charset="0"/>
-                <a:ea typeface="Consolas" pitchFamily="34" charset="-122"/>
-                <a:cs typeface="Consolas" pitchFamily="34" charset="-120"/>
-              </a:rPr>
-              <a:t>,</a:t>
-            </a:r>
-            <a:endParaRPr lang="en-US" sz="1500" dirty="0"/>
-          </a:p>
-          <a:p>
-            <a:pPr indent="0" marL="0">
-              <a:lnSpc>
-                <a:spcPct val="105000"/>
-              </a:lnSpc>
-              <a:buNone/>
-            </a:pPr>
-            <a:r>
-              <a:rPr lang="en-US" sz="1500" dirty="0">
-                <a:solidFill>
-                  <a:srgbClr val="E6EDF3"/>
-                </a:solidFill>
-                <a:latin typeface="Consolas" pitchFamily="34" charset="0"/>
-                <a:ea typeface="Consolas" pitchFamily="34" charset="-122"/>
-                <a:cs typeface="Consolas" pitchFamily="34" charset="-120"/>
-              </a:rPr>
-              <a:t>        textDirection: </a:t>
-            </a:r>
-            <a:pPr indent="0" marL="0">
-              <a:lnSpc>
-                <a:spcPct val="105000"/>
-              </a:lnSpc>
-              <a:buNone/>
-            </a:pPr>
-            <a:r>
-              <a:rPr lang="en-US" sz="1500" dirty="0">
-                <a:solidFill>
-                  <a:srgbClr val="FFCB6B"/>
-                </a:solidFill>
-                <a:latin typeface="Consolas" pitchFamily="34" charset="0"/>
-                <a:ea typeface="Consolas" pitchFamily="34" charset="-122"/>
-                <a:cs typeface="Consolas" pitchFamily="34" charset="-120"/>
-              </a:rPr>
-              <a:t>TextDirection</a:t>
-            </a:r>
-            <a:pPr indent="0" marL="0">
-              <a:lnSpc>
-                <a:spcPct val="105000"/>
-              </a:lnSpc>
-              <a:buNone/>
-            </a:pPr>
-            <a:r>
-              <a:rPr lang="en-US" sz="1500" dirty="0">
-                <a:solidFill>
-                  <a:srgbClr val="E6EDF3"/>
-                </a:solidFill>
-                <a:latin typeface="Consolas" pitchFamily="34" charset="0"/>
-                <a:ea typeface="Consolas" pitchFamily="34" charset="-122"/>
-                <a:cs typeface="Consolas" pitchFamily="34" charset="-120"/>
-              </a:rPr>
-              <a:t>.ltr,</a:t>
-            </a:r>
-            <a:endParaRPr lang="en-US" sz="1500" dirty="0"/>
-          </a:p>
-          <a:p>
-            <a:pPr indent="0" marL="0">
-              <a:lnSpc>
-                <a:spcPct val="105000"/>
-              </a:lnSpc>
-              <a:buNone/>
-            </a:pPr>
-            <a:r>
-              <a:rPr lang="en-US" sz="1500" dirty="0">
-                <a:solidFill>
-                  <a:srgbClr val="E6EDF3"/>
-                </a:solidFill>
-                <a:latin typeface="Consolas" pitchFamily="34" charset="0"/>
-                <a:ea typeface="Consolas" pitchFamily="34" charset="-122"/>
-                <a:cs typeface="Consolas" pitchFamily="34" charset="-120"/>
-              </a:rPr>
-              <a:t>        style: </a:t>
-            </a:r>
-            <a:pPr indent="0" marL="0">
-              <a:lnSpc>
-                <a:spcPct val="105000"/>
-              </a:lnSpc>
-              <a:buNone/>
-            </a:pPr>
-            <a:r>
-              <a:rPr lang="en-US" sz="1500" dirty="0">
-                <a:solidFill>
-                  <a:srgbClr val="FFCB6B"/>
-                </a:solidFill>
-                <a:latin typeface="Consolas" pitchFamily="34" charset="0"/>
-                <a:ea typeface="Consolas" pitchFamily="34" charset="-122"/>
-                <a:cs typeface="Consolas" pitchFamily="34" charset="-120"/>
-              </a:rPr>
-              <a:t>TextStyle</a:t>
-            </a:r>
-            <a:pPr indent="0" marL="0">
-              <a:lnSpc>
-                <a:spcPct val="105000"/>
-              </a:lnSpc>
-              <a:buNone/>
-            </a:pPr>
-            <a:r>
-              <a:rPr lang="en-US" sz="1500" dirty="0">
-                <a:solidFill>
-                  <a:srgbClr val="E6EDF3"/>
-                </a:solidFill>
-                <a:latin typeface="Consolas" pitchFamily="34" charset="0"/>
-                <a:ea typeface="Consolas" pitchFamily="34" charset="-122"/>
-                <a:cs typeface="Consolas" pitchFamily="34" charset="-120"/>
-              </a:rPr>
-              <a:t>(fontSize: </a:t>
-            </a:r>
-            <a:pPr indent="0" marL="0">
-              <a:lnSpc>
-                <a:spcPct val="105000"/>
-              </a:lnSpc>
-              <a:buNone/>
-            </a:pPr>
-            <a:r>
-              <a:rPr lang="en-US" sz="1500" dirty="0">
-                <a:solidFill>
-                  <a:srgbClr val="F78C6C"/>
-                </a:solidFill>
-                <a:latin typeface="Consolas" pitchFamily="34" charset="0"/>
-                <a:ea typeface="Consolas" pitchFamily="34" charset="-122"/>
-                <a:cs typeface="Consolas" pitchFamily="34" charset="-120"/>
-              </a:rPr>
               <a:t>32</a:t>
             </a:r>
-            <a:pPr indent="0" marL="0">
-              <a:lnSpc>
-                <a:spcPct val="105000"/>
-              </a:lnSpc>
-              <a:buNone/>
-            </a:pPr>
             <a:r>
               <a:rPr lang="en-US" sz="1500" dirty="0">
                 <a:solidFill>
@@ -13648,6 +13450,86 @@
               </a:rPr>
               <a:t>class</a:t>
             </a:r>
+            <a:r>
+              <a:rPr lang="en-US" sz="1400" dirty="0">
+                <a:solidFill>
+                  <a:srgbClr val="E6EDF3"/>
+                </a:solidFill>
+                <a:latin typeface="Consolas" pitchFamily="34" charset="0"/>
+                <a:ea typeface="Consolas" pitchFamily="34" charset="-122"/>
+                <a:cs typeface="Consolas" pitchFamily="34" charset="-120"/>
+              </a:rPr>
+              <a:t> </a:t>
+            </a:r>
+            <a:r>
+              <a:rPr lang="en-US" sz="1400" dirty="0">
+                <a:solidFill>
+                  <a:srgbClr val="FFCB6B"/>
+                </a:solidFill>
+                <a:latin typeface="Consolas" pitchFamily="34" charset="0"/>
+                <a:ea typeface="Consolas" pitchFamily="34" charset="-122"/>
+                <a:cs typeface="Consolas" pitchFamily="34" charset="-120"/>
+              </a:rPr>
+              <a:t>AplikasiSaya</a:t>
+            </a:r>
+            <a:r>
+              <a:rPr lang="en-US" sz="1400" dirty="0">
+                <a:solidFill>
+                  <a:srgbClr val="E6EDF3"/>
+                </a:solidFill>
+                <a:latin typeface="Consolas" pitchFamily="34" charset="0"/>
+                <a:ea typeface="Consolas" pitchFamily="34" charset="-122"/>
+                <a:cs typeface="Consolas" pitchFamily="34" charset="-120"/>
+              </a:rPr>
+              <a:t> </a:t>
+            </a:r>
+            <a:r>
+              <a:rPr lang="en-US" sz="1400" dirty="0">
+                <a:solidFill>
+                  <a:srgbClr val="C792EA"/>
+                </a:solidFill>
+                <a:latin typeface="Consolas" pitchFamily="34" charset="0"/>
+                <a:ea typeface="Consolas" pitchFamily="34" charset="-122"/>
+                <a:cs typeface="Consolas" pitchFamily="34" charset="-120"/>
+              </a:rPr>
+              <a:t>extends</a:t>
+            </a:r>
+            <a:r>
+              <a:rPr lang="en-US" sz="1400" dirty="0">
+                <a:solidFill>
+                  <a:srgbClr val="E6EDF3"/>
+                </a:solidFill>
+                <a:latin typeface="Consolas" pitchFamily="34" charset="0"/>
+                <a:ea typeface="Consolas" pitchFamily="34" charset="-122"/>
+                <a:cs typeface="Consolas" pitchFamily="34" charset="-120"/>
+              </a:rPr>
+              <a:t> </a:t>
+            </a:r>
+            <a:r>
+              <a:rPr lang="en-US" sz="1400" dirty="0">
+                <a:solidFill>
+                  <a:srgbClr val="FFCB6B"/>
+                </a:solidFill>
+                <a:latin typeface="Consolas" pitchFamily="34" charset="0"/>
+                <a:ea typeface="Consolas" pitchFamily="34" charset="-122"/>
+                <a:cs typeface="Consolas" pitchFamily="34" charset="-120"/>
+              </a:rPr>
+              <a:t>StatelessWidget</a:t>
+            </a:r>
+            <a:r>
+              <a:rPr lang="en-US" sz="1400" dirty="0">
+                <a:solidFill>
+                  <a:srgbClr val="E6EDF3"/>
+                </a:solidFill>
+                <a:latin typeface="Consolas" pitchFamily="34" charset="0"/>
+                <a:ea typeface="Consolas" pitchFamily="34" charset="-122"/>
+                <a:cs typeface="Consolas" pitchFamily="34" charset="-120"/>
+              </a:rPr>
+              <a:t> {</a:t>
+            </a:r>
+            <a:endParaRPr lang="en-US" sz="1400" dirty="0"/>
+          </a:p>
+          <a:p>
             <a:pPr indent="0" marL="0">
               <a:lnSpc>
                 <a:spcPct val="105000"/>
@@ -13663,8 +13545,77 @@
                 <a:ea typeface="Consolas" pitchFamily="34" charset="-122"/>
                 <a:cs typeface="Consolas" pitchFamily="34" charset="-120"/>
               </a:rPr>
+              <a:t>  </a:t>
+            </a:r>
+            <a:r>
+              <a:rPr lang="en-US" sz="1400" dirty="0">
+                <a:solidFill>
+                  <a:srgbClr val="C792EA"/>
+                </a:solidFill>
+                <a:latin typeface="Consolas" pitchFamily="34" charset="0"/>
+                <a:ea typeface="Consolas" pitchFamily="34" charset="-122"/>
+                <a:cs typeface="Consolas" pitchFamily="34" charset="-120"/>
+              </a:rPr>
+              <a:t>const</a:t>
+            </a:r>
+            <a:r>
+              <a:rPr lang="en-US" sz="1400" dirty="0">
+                <a:solidFill>
+                  <a:srgbClr val="E6EDF3"/>
+                </a:solidFill>
+                <a:latin typeface="Consolas" pitchFamily="34" charset="0"/>
+                <a:ea typeface="Consolas" pitchFamily="34" charset="-122"/>
+                <a:cs typeface="Consolas" pitchFamily="34" charset="-120"/>
+              </a:rPr>
               <a:t> </a:t>
             </a:r>
+            <a:r>
+              <a:rPr lang="en-US" sz="1400" dirty="0">
+                <a:solidFill>
+                  <a:srgbClr val="FFCB6B"/>
+                </a:solidFill>
+                <a:latin typeface="Consolas" pitchFamily="34" charset="0"/>
+                <a:ea typeface="Consolas" pitchFamily="34" charset="-122"/>
+                <a:cs typeface="Consolas" pitchFamily="34" charset="-120"/>
+              </a:rPr>
+              <a:t>AplikasiSaya</a:t>
+            </a:r>
+            <a:r>
+              <a:rPr lang="en-US" sz="1400" dirty="0">
+                <a:solidFill>
+                  <a:srgbClr val="E6EDF3"/>
+                </a:solidFill>
+                <a:latin typeface="Consolas" pitchFamily="34" charset="0"/>
+                <a:ea typeface="Consolas" pitchFamily="34" charset="-122"/>
+                <a:cs typeface="Consolas" pitchFamily="34" charset="-120"/>
+              </a:rPr>
+              <a:t>({</a:t>
+            </a:r>
+            <a:r>
+              <a:rPr lang="en-US" sz="1400" dirty="0">
+                <a:solidFill>
+                  <a:srgbClr val="C792EA"/>
+                </a:solidFill>
+                <a:latin typeface="Consolas" pitchFamily="34" charset="0"/>
+                <a:ea typeface="Consolas" pitchFamily="34" charset="-122"/>
+                <a:cs typeface="Consolas" pitchFamily="34" charset="-120"/>
+              </a:rPr>
+              <a:t>super</a:t>
+            </a:r>
+            <a:r>
+              <a:rPr lang="en-US" sz="1400" dirty="0">
+                <a:solidFill>
+                  <a:srgbClr val="E6EDF3"/>
+                </a:solidFill>
+                <a:latin typeface="Consolas" pitchFamily="34" charset="0"/>
+                <a:ea typeface="Consolas" pitchFamily="34" charset="-122"/>
+                <a:cs typeface="Consolas" pitchFamily="34" charset="-120"/>
+              </a:rPr>
+              <a:t>.key});</a:t>
+            </a:r>
+            <a:endParaRPr lang="en-US" sz="1400" dirty="0"/>
+          </a:p>
+          <a:p>
             <a:pPr indent="0" marL="0">
               <a:lnSpc>
                 <a:spcPct val="105000"/>
@@ -13674,14 +13625,17 @@
             <a:r>
               <a:rPr lang="en-US" sz="1400" dirty="0">
                 <a:solidFill>
-                  <a:srgbClr val="FFCB6B"/>
+                  <a:srgbClr val="E6EDF3"/>
                 </a:solidFill>
                 <a:latin typeface="Consolas" pitchFamily="34" charset="0"/>
                 <a:ea typeface="Consolas" pitchFamily="34" charset="-122"/>
                 <a:cs typeface="Consolas" pitchFamily="34" charset="-120"/>
               </a:rPr>
-              <a:t>AplikasiSaya</a:t>
-            </a:r>
+              <a:t> </a:t>
+            </a:r>
+            <a:endParaRPr lang="en-US" sz="1400" dirty="0"/>
+          </a:p>
+          <a:p>
             <a:pPr indent="0" marL="0">
               <a:lnSpc>
                 <a:spcPct val="105000"/>
@@ -13697,8 +13651,22 @@
                 <a:ea typeface="Consolas" pitchFamily="34" charset="-122"/>
                 <a:cs typeface="Consolas" pitchFamily="34" charset="-120"/>
               </a:rPr>
-              <a:t> </a:t>
-            </a:r>
+              <a:t>  </a:t>
+            </a:r>
+            <a:r>
+              <a:rPr lang="en-US" sz="1400" dirty="0">
+                <a:solidFill>
+                  <a:srgbClr val="89DDFF"/>
+                </a:solidFill>
+                <a:latin typeface="Consolas" pitchFamily="34" charset="0"/>
+                <a:ea typeface="Consolas" pitchFamily="34" charset="-122"/>
+                <a:cs typeface="Consolas" pitchFamily="34" charset="-120"/>
+              </a:rPr>
+              <a:t>@override</a:t>
+            </a:r>
+            <a:endParaRPr lang="en-US" sz="1400" dirty="0"/>
+          </a:p>
+          <a:p>
             <a:pPr indent="0" marL="0">
               <a:lnSpc>
                 <a:spcPct val="105000"/>
@@ -13708,14 +13676,61 @@
             <a:r>
               <a:rPr lang="en-US" sz="1400" dirty="0">
                 <a:solidFill>
-                  <a:srgbClr val="C792EA"/>
+                  <a:srgbClr val="E6EDF3"/>
                 </a:solidFill>
                 <a:latin typeface="Consolas" pitchFamily="34" charset="0"/>
                 <a:ea typeface="Consolas" pitchFamily="34" charset="-122"/>
                 <a:cs typeface="Consolas" pitchFamily="34" charset="-120"/>
               </a:rPr>
-              <a:t>extends</a:t>
-            </a:r>
+              <a:t>  </a:t>
+            </a:r>
+            <a:r>
+              <a:rPr lang="en-US" sz="1400" dirty="0">
+                <a:solidFill>
+                  <a:srgbClr val="FFCB6B"/>
+                </a:solidFill>
+                <a:latin typeface="Consolas" pitchFamily="34" charset="0"/>
+                <a:ea typeface="Consolas" pitchFamily="34" charset="-122"/>
+                <a:cs typeface="Consolas" pitchFamily="34" charset="-120"/>
+              </a:rPr>
+              <a:t>Widget</a:t>
+            </a:r>
+            <a:r>
+              <a:rPr lang="en-US" sz="1400" dirty="0">
+                <a:solidFill>
+                  <a:srgbClr val="E6EDF3"/>
+                </a:solidFill>
+                <a:latin typeface="Consolas" pitchFamily="34" charset="0"/>
+                <a:ea typeface="Consolas" pitchFamily="34" charset="-122"/>
+                <a:cs typeface="Consolas" pitchFamily="34" charset="-120"/>
+              </a:rPr>
+              <a:t> build(</a:t>
+            </a:r>
+            <a:r>
+              <a:rPr lang="en-US" sz="1400" dirty="0">
+                <a:solidFill>
+                  <a:srgbClr val="FFCB6B"/>
+                </a:solidFill>
+                <a:latin typeface="Consolas" pitchFamily="34" charset="0"/>
+                <a:ea typeface="Consolas" pitchFamily="34" charset="-122"/>
+                <a:cs typeface="Consolas" pitchFamily="34" charset="-120"/>
+              </a:rPr>
+              <a:t>BuildContext</a:t>
+            </a:r>
+            <a:r>
+              <a:rPr lang="en-US" sz="1400" dirty="0">
+                <a:solidFill>
+                  <a:srgbClr val="E6EDF3"/>
+                </a:solidFill>
+                <a:latin typeface="Consolas" pitchFamily="34" charset="0"/>
+                <a:ea typeface="Consolas" pitchFamily="34" charset="-122"/>
+                <a:cs typeface="Consolas" pitchFamily="34" charset="-120"/>
+              </a:rPr>
+              <a:t> context) {</a:t>
+            </a:r>
+            <a:endParaRPr lang="en-US" sz="1400" dirty="0"/>
+          </a:p>
+          <a:p>
             <a:pPr indent="0" marL="0">
               <a:lnSpc>
                 <a:spcPct val="105000"/>
@@ -13731,8 +13746,77 @@
                 <a:ea typeface="Consolas" pitchFamily="34" charset="-122"/>
                 <a:cs typeface="Consolas" pitchFamily="34" charset="-120"/>
               </a:rPr>
+              <a:t>    </a:t>
+            </a:r>
+            <a:r>
+              <a:rPr lang="en-US" sz="1400" dirty="0">
+                <a:solidFill>
+                  <a:srgbClr val="C792EA"/>
+                </a:solidFill>
+                <a:latin typeface="Consolas" pitchFamily="34" charset="0"/>
+                <a:ea typeface="Consolas" pitchFamily="34" charset="-122"/>
+                <a:cs typeface="Consolas" pitchFamily="34" charset="-120"/>
+              </a:rPr>
+              <a:t>return</a:t>
+            </a:r>
+            <a:r>
+              <a:rPr lang="en-US" sz="1400" dirty="0">
+                <a:solidFill>
+                  <a:srgbClr val="E6EDF3"/>
+                </a:solidFill>
+                <a:latin typeface="Consolas" pitchFamily="34" charset="0"/>
+                <a:ea typeface="Consolas" pitchFamily="34" charset="-122"/>
+                <a:cs typeface="Consolas" pitchFamily="34" charset="-120"/>
+              </a:rPr>
               <a:t> </a:t>
             </a:r>
+            <a:r>
+              <a:rPr lang="en-US" sz="1400" dirty="0">
+                <a:solidFill>
+                  <a:srgbClr val="C792EA"/>
+                </a:solidFill>
+                <a:latin typeface="Consolas" pitchFamily="34" charset="0"/>
+                <a:ea typeface="Consolas" pitchFamily="34" charset="-122"/>
+                <a:cs typeface="Consolas" pitchFamily="34" charset="-120"/>
+              </a:rPr>
+              <a:t>const</a:t>
+            </a:r>
+            <a:r>
+              <a:rPr lang="en-US" sz="1400" dirty="0">
+                <a:solidFill>
+                  <a:srgbClr val="E6EDF3"/>
+                </a:solidFill>
+                <a:latin typeface="Consolas" pitchFamily="34" charset="0"/>
+                <a:ea typeface="Consolas" pitchFamily="34" charset="-122"/>
+                <a:cs typeface="Consolas" pitchFamily="34" charset="-120"/>
+              </a:rPr>
+              <a:t> </a:t>
+            </a:r>
+            <a:r>
+              <a:rPr lang="en-US" sz="1400" dirty="0">
+                <a:solidFill>
+                  <a:srgbClr val="FFCB6B"/>
+                </a:solidFill>
+                <a:latin typeface="Consolas" pitchFamily="34" charset="0"/>
+                <a:ea typeface="Consolas" pitchFamily="34" charset="-122"/>
+                <a:cs typeface="Consolas" pitchFamily="34" charset="-120"/>
+              </a:rPr>
+              <a:t>MaterialApp</a:t>
+            </a:r>
+            <a:r>
+              <a:rPr lang="en-US" sz="1400" dirty="0">
+                <a:solidFill>
+                  <a:srgbClr val="E6EDF3"/>
+                </a:solidFill>
+                <a:latin typeface="Consolas" pitchFamily="34" charset="0"/>
+                <a:ea typeface="Consolas" pitchFamily="34" charset="-122"/>
+                <a:cs typeface="Consolas" pitchFamily="34" charset="-120"/>
+              </a:rPr>
+              <a:t>(</a:t>
+            </a:r>
+            <a:endParaRPr lang="en-US" sz="1400" dirty="0"/>
+          </a:p>
+          <a:p>
             <a:pPr indent="0" marL="0">
               <a:lnSpc>
                 <a:spcPct val="105000"/>
@@ -13742,14 +13826,39 @@
             <a:r>
               <a:rPr lang="en-US" sz="1400" dirty="0">
                 <a:solidFill>
-                  <a:srgbClr val="FFCB6B"/>
+                  <a:srgbClr val="E6EDF3"/>
                 </a:solidFill>
                 <a:latin typeface="Consolas" pitchFamily="34" charset="0"/>
                 <a:ea typeface="Consolas" pitchFamily="34" charset="-122"/>
                 <a:cs typeface="Consolas" pitchFamily="34" charset="-120"/>
               </a:rPr>
-              <a:t>StatelessWidget</a:t>
-            </a:r>
+              <a:t>      title: </a:t>
+            </a:r>
+            <a:r>
+              <a:rPr lang="en-US" sz="1400" dirty="0">
+                <a:solidFill>
+                  <a:srgbClr val="C3E88D"/>
+                </a:solidFill>
+                <a:latin typeface="Consolas" pitchFamily="34" charset="0"/>
+                <a:ea typeface="Consolas" pitchFamily="34" charset="-122"/>
+                <a:cs typeface="Consolas" pitchFamily="34" charset="-120"/>
+              </a:rPr>
+              <a:t>'Aplikasi Pertama'</a:t>
+            </a:r>
+            <a:r>
+              <a:rPr lang="en-US" sz="1400" dirty="0">
+                <a:solidFill>
+                  <a:srgbClr val="E6EDF3"/>
+                </a:solidFill>
+                <a:latin typeface="Consolas" pitchFamily="34" charset="0"/>
+                <a:ea typeface="Consolas" pitchFamily="34" charset="-122"/>
+                <a:cs typeface="Consolas" pitchFamily="34" charset="-120"/>
+              </a:rPr>
+              <a:t>,</a:t>
+            </a:r>
+            <a:endParaRPr lang="en-US" sz="1400" dirty="0"/>
+          </a:p>
+          <a:p>
             <a:pPr indent="0" marL="0">
               <a:lnSpc>
                 <a:spcPct val="105000"/>
@@ -13765,7 +13874,29 @@
                 <a:ea typeface="Consolas" pitchFamily="34" charset="-122"/>
                 <a:cs typeface="Consolas" pitchFamily="34" charset="-120"/>
               </a:rPr>
-              <a:t> {</a:t>
+              <a:t>      home: </a:t>
+            </a:r>
+            <a:r>
+              <a:rPr lang="en-US" sz="1400" dirty="0">
+                <a:solidFill>
+                  <a:srgbClr val="FFCB6B"/>
+                </a:solidFill>
+                <a:latin typeface="Consolas" pitchFamily="34" charset="0"/>
+                <a:ea typeface="Consolas" pitchFamily="34" charset="-122"/>
+                <a:cs typeface="Consolas" pitchFamily="34" charset="-120"/>
+              </a:rPr>
+              <a:t>HalamanUtama</a:t>
+            </a:r>
+            <a:r>
+              <a:rPr lang="en-US" sz="1400" dirty="0">
+                <a:solidFill>
+                  <a:srgbClr val="E6EDF3"/>
+                </a:solidFill>
+                <a:latin typeface="Consolas" pitchFamily="34" charset="0"/>
+                <a:ea typeface="Consolas" pitchFamily="34" charset="-122"/>
+                <a:cs typeface="Consolas" pitchFamily="34" charset="-120"/>
+              </a:rPr>
+              <a:t>(),</a:t>
             </a:r>
             <a:endParaRPr lang="en-US" sz="1400" dirty="0"/>
           </a:p>
@@ -13785,8 +13916,11 @@
                 <a:ea typeface="Consolas" pitchFamily="34" charset="-122"/>
                 <a:cs typeface="Consolas" pitchFamily="34" charset="-120"/>
               </a:rPr>
-              <a:t>  </a:t>
-            </a:r>
+              <a:t>    );</a:t>
+            </a:r>
+            <a:endParaRPr lang="en-US" sz="1400" dirty="0"/>
+          </a:p>
+          <a:p>
             <a:pPr indent="0" marL="0">
               <a:lnSpc>
                 <a:spcPct val="105000"/>
@@ -13796,14 +13930,17 @@
             <a:r>
               <a:rPr lang="en-US" sz="1400" dirty="0">
                 <a:solidFill>
-                  <a:srgbClr val="C792EA"/>
+                  <a:srgbClr val="E6EDF3"/>
                 </a:solidFill>
                 <a:latin typeface="Consolas" pitchFamily="34" charset="0"/>
                 <a:ea typeface="Consolas" pitchFamily="34" charset="-122"/>
                 <a:cs typeface="Consolas" pitchFamily="34" charset="-120"/>
               </a:rPr>
-              <a:t>const</a:t>
-            </a:r>
+              <a:t>  }</a:t>
+            </a:r>
+            <a:endParaRPr lang="en-US" sz="1400" dirty="0"/>
+          </a:p>
+          <a:p>
             <a:pPr indent="0" marL="0">
               <a:lnSpc>
                 <a:spcPct val="105000"/>
@@ -13819,8 +13956,11 @@
                 <a:ea typeface="Consolas" pitchFamily="34" charset="-122"/>
                 <a:cs typeface="Consolas" pitchFamily="34" charset="-120"/>
               </a:rPr>
-              <a:t> </a:t>
-            </a:r>
+              <a:t>}</a:t>
+            </a:r>
+            <a:endParaRPr lang="en-US" sz="1400" dirty="0"/>
+          </a:p>
+          <a:p>
             <a:pPr indent="0" marL="0">
               <a:lnSpc>
                 <a:spcPct val="105000"/>
@@ -13830,14 +13970,17 @@
             <a:r>
               <a:rPr lang="en-US" sz="1400" dirty="0">
                 <a:solidFill>
-                  <a:srgbClr val="FFCB6B"/>
+                  <a:srgbClr val="E6EDF3"/>
                 </a:solidFill>
                 <a:latin typeface="Consolas" pitchFamily="34" charset="0"/>
                 <a:ea typeface="Consolas" pitchFamily="34" charset="-122"/>
                 <a:cs typeface="Consolas" pitchFamily="34" charset="-120"/>
               </a:rPr>
-              <a:t>AplikasiSaya</a:t>
-            </a:r>
+              <a:t> </a:t>
+            </a:r>
+            <a:endParaRPr lang="en-US" sz="1400" dirty="0"/>
+          </a:p>
+          <a:p>
             <a:pPr indent="0" marL="0">
               <a:lnSpc>
                 <a:spcPct val="105000"/>
@@ -13845,16 +13988,19 @@
               <a:buNone/>
             </a:pPr>
             <a:r>
-              <a:rPr lang="en-US" sz="1400" dirty="0">
-                <a:solidFill>
-                  <a:srgbClr val="E6EDF3"/>
+              <a:rPr lang="en-US" sz="1400" i="1" dirty="0">
+                <a:solidFill>
+                  <a:srgbClr val="8FA3BC"/>
                 </a:solidFill>
                 <a:latin typeface="Consolas" pitchFamily="34" charset="0"/>
                 <a:ea typeface="Consolas" pitchFamily="34" charset="-122"/>
                 <a:cs typeface="Consolas" pitchFamily="34" charset="-120"/>
               </a:rPr>
-              <a:t>({</a:t>
-            </a:r>
+              <a:t>// di dalam HalamanUtama.build():</a:t>
+            </a:r>
+            <a:endParaRPr lang="en-US" sz="1400" dirty="0"/>
+          </a:p>
+          <a:p>
             <a:pPr indent="0" marL="0">
               <a:lnSpc>
                 <a:spcPct val="105000"/>
@@ -13870,8 +14016,44 @@
                 <a:ea typeface="Consolas" pitchFamily="34" charset="-122"/>
                 <a:cs typeface="Consolas" pitchFamily="34" charset="-120"/>
               </a:rPr>
-              <a:t>super</a:t>
-            </a:r>
+              <a:t>return</a:t>
+            </a:r>
+            <a:r>
+              <a:rPr lang="en-US" sz="1400" dirty="0">
+                <a:solidFill>
+                  <a:srgbClr val="E6EDF3"/>
+                </a:solidFill>
+                <a:latin typeface="Consolas" pitchFamily="34" charset="0"/>
+                <a:ea typeface="Consolas" pitchFamily="34" charset="-122"/>
+                <a:cs typeface="Consolas" pitchFamily="34" charset="-120"/>
+              </a:rPr>
+              <a:t> </a:t>
+            </a:r>
+            <a:r>
+              <a:rPr lang="en-US" sz="1400" dirty="0">
+                <a:solidFill>
+                  <a:srgbClr val="FFCB6B"/>
+                </a:solidFill>
+                <a:latin typeface="Consolas" pitchFamily="34" charset="0"/>
+                <a:ea typeface="Consolas" pitchFamily="34" charset="-122"/>
+                <a:cs typeface="Consolas" pitchFamily="34" charset="-120"/>
+              </a:rPr>
+              <a:t>Scaffold</a:t>
+            </a:r>
+            <a:r>
+              <a:rPr lang="en-US" sz="1400" dirty="0">
+                <a:solidFill>
+                  <a:srgbClr val="E6EDF3"/>
+                </a:solidFill>
+                <a:latin typeface="Consolas" pitchFamily="34" charset="0"/>
+                <a:ea typeface="Consolas" pitchFamily="34" charset="-122"/>
+                <a:cs typeface="Consolas" pitchFamily="34" charset="-120"/>
+              </a:rPr>
+              <a:t>(</a:t>
+            </a:r>
+            <a:endParaRPr lang="en-US" sz="1400" dirty="0"/>
+          </a:p>
+          <a:p>
             <a:pPr indent="0" marL="0">
               <a:lnSpc>
                 <a:spcPct val="105000"/>
@@ -13887,7 +14069,95 @@
                 <a:ea typeface="Consolas" pitchFamily="34" charset="-122"/>
                 <a:cs typeface="Consolas" pitchFamily="34" charset="-120"/>
               </a:rPr>
-              <a:t>.key});</a:t>
+              <a:t>  appBar: </a:t>
+            </a:r>
+            <a:r>
+              <a:rPr lang="en-US" sz="1400" dirty="0">
+                <a:solidFill>
+                  <a:srgbClr val="FFCB6B"/>
+                </a:solidFill>
+                <a:latin typeface="Consolas" pitchFamily="34" charset="0"/>
+                <a:ea typeface="Consolas" pitchFamily="34" charset="-122"/>
+                <a:cs typeface="Consolas" pitchFamily="34" charset="-120"/>
+              </a:rPr>
+              <a:t>AppBar</a:t>
+            </a:r>
+            <a:r>
+              <a:rPr lang="en-US" sz="1400" dirty="0">
+                <a:solidFill>
+                  <a:srgbClr val="E6EDF3"/>
+                </a:solidFill>
+                <a:latin typeface="Consolas" pitchFamily="34" charset="0"/>
+                <a:ea typeface="Consolas" pitchFamily="34" charset="-122"/>
+                <a:cs typeface="Consolas" pitchFamily="34" charset="-120"/>
+              </a:rPr>
+              <a:t>(title: </a:t>
+            </a:r>
+            <a:r>
+              <a:rPr lang="en-US" sz="1400" dirty="0">
+                <a:solidFill>
+                  <a:srgbClr val="C792EA"/>
+                </a:solidFill>
+                <a:latin typeface="Consolas" pitchFamily="34" charset="0"/>
+                <a:ea typeface="Consolas" pitchFamily="34" charset="-122"/>
+                <a:cs typeface="Consolas" pitchFamily="34" charset="-120"/>
+              </a:rPr>
+              <a:t>const</a:t>
+            </a:r>
+            <a:r>
+              <a:rPr lang="en-US" sz="1400" dirty="0">
+                <a:solidFill>
+                  <a:srgbClr val="E6EDF3"/>
+                </a:solidFill>
+                <a:latin typeface="Consolas" pitchFamily="34" charset="0"/>
+                <a:ea typeface="Consolas" pitchFamily="34" charset="-122"/>
+                <a:cs typeface="Consolas" pitchFamily="34" charset="-120"/>
+              </a:rPr>
+              <a:t> </a:t>
+            </a:r>
+            <a:r>
+              <a:rPr lang="en-US" sz="1400" dirty="0">
+                <a:solidFill>
+                  <a:srgbClr val="FFCB6B"/>
+                </a:solidFill>
+                <a:latin typeface="Consolas" pitchFamily="34" charset="0"/>
+                <a:ea typeface="Consolas" pitchFamily="34" charset="-122"/>
+                <a:cs typeface="Consolas" pitchFamily="34" charset="-120"/>
+              </a:rPr>
+              <a:t>Text</a:t>
+            </a:r>
+            <a:r>
+              <a:rPr lang="en-US" sz="1400" dirty="0">
+                <a:solidFill>
+                  <a:srgbClr val="E6EDF3"/>
+                </a:solidFill>
+                <a:latin typeface="Consolas" pitchFamily="34" charset="0"/>
+                <a:ea typeface="Consolas" pitchFamily="34" charset="-122"/>
+                <a:cs typeface="Consolas" pitchFamily="34" charset="-120"/>
+              </a:rPr>
+              <a:t>(</a:t>
+            </a:r>
+            <a:r>
+              <a:rPr lang="en-US" sz="1400" dirty="0">
+                <a:solidFill>
+                  <a:srgbClr val="C3E88D"/>
+                </a:solidFill>
+                <a:latin typeface="Consolas" pitchFamily="34" charset="0"/>
+                <a:ea typeface="Consolas" pitchFamily="34" charset="-122"/>
+                <a:cs typeface="Consolas" pitchFamily="34" charset="-120"/>
+              </a:rPr>
+              <a:t>'Halo'</a:t>
+            </a:r>
+            <a:r>
+              <a:rPr lang="en-US" sz="1400" dirty="0">
+                <a:solidFill>
+                  <a:srgbClr val="E6EDF3"/>
+                </a:solidFill>
+                <a:latin typeface="Consolas" pitchFamily="34" charset="0"/>
+                <a:ea typeface="Consolas" pitchFamily="34" charset="-122"/>
+                <a:cs typeface="Consolas" pitchFamily="34" charset="-120"/>
+              </a:rPr>
+              <a:t>)),</a:t>
             </a:r>
             <a:endParaRPr lang="en-US" sz="1400" dirty="0"/>
           </a:p>
@@ -13907,835 +14177,85 @@
                 <a:ea typeface="Consolas" pitchFamily="34" charset="-122"/>
                 <a:cs typeface="Consolas" pitchFamily="34" charset="-120"/>
               </a:rPr>
-              <a:t> </a:t>
-            </a:r>
-            <a:endParaRPr lang="en-US" sz="1400" dirty="0"/>
-          </a:p>
-          <a:p>
-            <a:pPr indent="0" marL="0">
-              <a:lnSpc>
-                <a:spcPct val="105000"/>
-              </a:lnSpc>
-              <a:buNone/>
-            </a:pPr>
+              <a:t>  body: </a:t>
+            </a:r>
             <a:r>
               <a:rPr lang="en-US" sz="1400" dirty="0">
                 <a:solidFill>
-                  <a:srgbClr val="E6EDF3"/>
+                  <a:srgbClr val="C792EA"/>
                 </a:solidFill>
                 <a:latin typeface="Consolas" pitchFamily="34" charset="0"/>
                 <a:ea typeface="Consolas" pitchFamily="34" charset="-122"/>
                 <a:cs typeface="Consolas" pitchFamily="34" charset="-120"/>
               </a:rPr>
-              <a:t>  </a:t>
-            </a:r>
-            <a:pPr indent="0" marL="0">
-              <a:lnSpc>
-                <a:spcPct val="105000"/>
-              </a:lnSpc>
-              <a:buNone/>
-            </a:pPr>
+              <a:t>const</a:t>
+            </a:r>
             <a:r>
               <a:rPr lang="en-US" sz="1400" dirty="0">
                 <a:solidFill>
-                  <a:srgbClr val="89DDFF"/>
+                  <a:srgbClr val="E6EDF3"/>
                 </a:solidFill>
                 <a:latin typeface="Consolas" pitchFamily="34" charset="0"/>
                 <a:ea typeface="Consolas" pitchFamily="34" charset="-122"/>
                 <a:cs typeface="Consolas" pitchFamily="34" charset="-120"/>
               </a:rPr>
-              <a:t>@override</a:t>
-            </a:r>
-            <a:endParaRPr lang="en-US" sz="1400" dirty="0"/>
-          </a:p>
-          <a:p>
-            <a:pPr indent="0" marL="0">
-              <a:lnSpc>
-                <a:spcPct val="105000"/>
-              </a:lnSpc>
-              <a:buNone/>
-            </a:pPr>
+              <a:t> </a:t>
+            </a:r>
             <a:r>
               <a:rPr lang="en-US" sz="1400" dirty="0">
                 <a:solidFill>
-                  <a:srgbClr val="E6EDF3"/>
+                  <a:srgbClr val="FFCB6B"/>
                 </a:solidFill>
                 <a:latin typeface="Consolas" pitchFamily="34" charset="0"/>
                 <a:ea typeface="Consolas" pitchFamily="34" charset="-122"/>
                 <a:cs typeface="Consolas" pitchFamily="34" charset="-120"/>
               </a:rPr>
-              <a:t>  </a:t>
-            </a:r>
-            <a:pPr indent="0" marL="0">
-              <a:lnSpc>
-                <a:spcPct val="105000"/>
-              </a:lnSpc>
-              <a:buNone/>
-            </a:pPr>
+              <a:t>Center</a:t>
+            </a:r>
             <a:r>
               <a:rPr lang="en-US" sz="1400" dirty="0">
                 <a:solidFill>
-                  <a:srgbClr val="FFCB6B"/>
+                  <a:srgbClr val="E6EDF3"/>
                 </a:solidFill>
                 <a:latin typeface="Consolas" pitchFamily="34" charset="0"/>
                 <a:ea typeface="Consolas" pitchFamily="34" charset="-122"/>
                 <a:cs typeface="Consolas" pitchFamily="34" charset="-120"/>
               </a:rPr>
-              <a:t>Widget</a:t>
-            </a:r>
-            <a:pPr indent="0" marL="0">
-              <a:lnSpc>
-                <a:spcPct val="105000"/>
-              </a:lnSpc>
-              <a:buNone/>
-            </a:pPr>
+              <a:t>(child: </a:t>
+            </a:r>
             <a:r>
               <a:rPr lang="en-US" sz="1400" dirty="0">
                 <a:solidFill>
-                  <a:srgbClr val="E6EDF3"/>
+                  <a:srgbClr val="FFCB6B"/>
                 </a:solidFill>
                 <a:latin typeface="Consolas" pitchFamily="34" charset="0"/>
                 <a:ea typeface="Consolas" pitchFamily="34" charset="-122"/>
                 <a:cs typeface="Consolas" pitchFamily="34" charset="-120"/>
               </a:rPr>
-              <a:t> build(</a:t>
-            </a:r>
-            <a:pPr indent="0" marL="0">
-              <a:lnSpc>
-                <a:spcPct val="105000"/>
-              </a:lnSpc>
-              <a:buNone/>
-            </a:pPr>
+              <a:t>Text</a:t>
+            </a:r>
             <a:r>
               <a:rPr lang="en-US" sz="1400" dirty="0">
                 <a:solidFill>
-                  <a:srgbClr val="FFCB6B"/>
+                  <a:srgbClr val="E6EDF3"/>
                 </a:solidFill>
                 <a:latin typeface="Consolas" pitchFamily="34" charset="0"/>
                 <a:ea typeface="Consolas" pitchFamily="34" charset="-122"/>
                 <a:cs typeface="Consolas" pitchFamily="34" charset="-120"/>
               </a:rPr>
-              <a:t>BuildContext</a:t>
-            </a:r>
-            <a:pPr indent="0" marL="0">
-              <a:lnSpc>
-                <a:spcPct val="105000"/>
-              </a:lnSpc>
-              <a:buNone/>
-            </a:pPr>
+              <a:t>(</a:t>
+            </a:r>
             <a:r>
               <a:rPr lang="en-US" sz="1400" dirty="0">
                 <a:solidFill>
-                  <a:srgbClr val="E6EDF3"/>
+                  <a:srgbClr val="C3E88D"/>
                 </a:solidFill>
                 <a:latin typeface="Consolas" pitchFamily="34" charset="0"/>
                 <a:ea typeface="Consolas" pitchFamily="34" charset="-122"/>
                 <a:cs typeface="Consolas" pitchFamily="34" charset="-120"/>
               </a:rPr>
-              <a:t> context) {</a:t>
-            </a:r>
-            <a:endParaRPr lang="en-US" sz="1400" dirty="0"/>
-          </a:p>
-          <a:p>
-            <a:pPr indent="0" marL="0">
-              <a:lnSpc>
-                <a:spcPct val="105000"/>
-              </a:lnSpc>
-              <a:buNone/>
-            </a:pPr>
-            <a:r>
-              <a:rPr lang="en-US" sz="1400" dirty="0">
-                <a:solidFill>
-                  <a:srgbClr val="E6EDF3"/>
-                </a:solidFill>
-                <a:latin typeface="Consolas" pitchFamily="34" charset="0"/>
-                <a:ea typeface="Consolas" pitchFamily="34" charset="-122"/>
-                <a:cs typeface="Consolas" pitchFamily="34" charset="-120"/>
-              </a:rPr>
-              <a:t>    </a:t>
-            </a:r>
-            <a:pPr indent="0" marL="0">
-              <a:lnSpc>
-                <a:spcPct val="105000"/>
-              </a:lnSpc>
-              <a:buNone/>
-            </a:pPr>
-            <a:r>
-              <a:rPr lang="en-US" sz="1400" dirty="0">
-                <a:solidFill>
-                  <a:srgbClr val="C792EA"/>
-                </a:solidFill>
-                <a:latin typeface="Consolas" pitchFamily="34" charset="0"/>
-                <a:ea typeface="Consolas" pitchFamily="34" charset="-122"/>
-                <a:cs typeface="Consolas" pitchFamily="34" charset="-120"/>
-              </a:rPr>
-              <a:t>return</a:t>
-            </a:r>
-            <a:pPr indent="0" marL="0">
-              <a:lnSpc>
-                <a:spcPct val="105000"/>
-              </a:lnSpc>
-              <a:buNone/>
-            </a:pPr>
-            <a:r>
-              <a:rPr lang="en-US" sz="1400" dirty="0">
-                <a:solidFill>
-                  <a:srgbClr val="E6EDF3"/>
-                </a:solidFill>
-                <a:latin typeface="Consolas" pitchFamily="34" charset="0"/>
-                <a:ea typeface="Consolas" pitchFamily="34" charset="-122"/>
-                <a:cs typeface="Consolas" pitchFamily="34" charset="-120"/>
-              </a:rPr>
-              <a:t> </a:t>
-            </a:r>
-            <a:pPr indent="0" marL="0">
-              <a:lnSpc>
-                <a:spcPct val="105000"/>
-              </a:lnSpc>
-              <a:buNone/>
-            </a:pPr>
-            <a:r>
-              <a:rPr lang="en-US" sz="1400" dirty="0">
-                <a:solidFill>
-                  <a:srgbClr val="C792EA"/>
-                </a:solidFill>
-                <a:latin typeface="Consolas" pitchFamily="34" charset="0"/>
-                <a:ea typeface="Consolas" pitchFamily="34" charset="-122"/>
-                <a:cs typeface="Consolas" pitchFamily="34" charset="-120"/>
-              </a:rPr>
-              <a:t>const</a:t>
-            </a:r>
-            <a:pPr indent="0" marL="0">
-              <a:lnSpc>
-                <a:spcPct val="105000"/>
-              </a:lnSpc>
-              <a:buNone/>
-            </a:pPr>
-            <a:r>
-              <a:rPr lang="en-US" sz="1400" dirty="0">
-                <a:solidFill>
-                  <a:srgbClr val="E6EDF3"/>
-                </a:solidFill>
-                <a:latin typeface="Consolas" pitchFamily="34" charset="0"/>
-                <a:ea typeface="Consolas" pitchFamily="34" charset="-122"/>
-                <a:cs typeface="Consolas" pitchFamily="34" charset="-120"/>
-              </a:rPr>
-              <a:t> </a:t>
-            </a:r>
-            <a:pPr indent="0" marL="0">
-              <a:lnSpc>
-                <a:spcPct val="105000"/>
-              </a:lnSpc>
-              <a:buNone/>
-            </a:pPr>
-            <a:r>
-              <a:rPr lang="en-US" sz="1400" dirty="0">
-                <a:solidFill>
-                  <a:srgbClr val="FFCB6B"/>
-                </a:solidFill>
-                <a:latin typeface="Consolas" pitchFamily="34" charset="0"/>
-                <a:ea typeface="Consolas" pitchFamily="34" charset="-122"/>
-                <a:cs typeface="Consolas" pitchFamily="34" charset="-120"/>
-              </a:rPr>
-              <a:t>MaterialApp</a:t>
-            </a:r>
-            <a:pPr indent="0" marL="0">
-              <a:lnSpc>
-                <a:spcPct val="105000"/>
-              </a:lnSpc>
-              <a:buNone/>
-            </a:pPr>
-            <a:r>
-              <a:rPr lang="en-US" sz="1400" dirty="0">
-                <a:solidFill>
-                  <a:srgbClr val="E6EDF3"/>
-                </a:solidFill>
-                <a:latin typeface="Consolas" pitchFamily="34" charset="0"/>
-                <a:ea typeface="Consolas" pitchFamily="34" charset="-122"/>
-                <a:cs typeface="Consolas" pitchFamily="34" charset="-120"/>
-              </a:rPr>
-              <a:t>(</a:t>
-            </a:r>
-            <a:endParaRPr lang="en-US" sz="1400" dirty="0"/>
-          </a:p>
-          <a:p>
-            <a:pPr indent="0" marL="0">
-              <a:lnSpc>
-                <a:spcPct val="105000"/>
-              </a:lnSpc>
-              <a:buNone/>
-            </a:pPr>
-            <a:r>
-              <a:rPr lang="en-US" sz="1400" dirty="0">
-                <a:solidFill>
-                  <a:srgbClr val="E6EDF3"/>
-                </a:solidFill>
-                <a:latin typeface="Consolas" pitchFamily="34" charset="0"/>
-                <a:ea typeface="Consolas" pitchFamily="34" charset="-122"/>
-                <a:cs typeface="Consolas" pitchFamily="34" charset="-120"/>
-              </a:rPr>
-              <a:t>      title: </a:t>
-            </a:r>
-            <a:pPr indent="0" marL="0">
-              <a:lnSpc>
-                <a:spcPct val="105000"/>
-              </a:lnSpc>
-              <a:buNone/>
-            </a:pPr>
-            <a:r>
-              <a:rPr lang="en-US" sz="1400" dirty="0">
-                <a:solidFill>
-                  <a:srgbClr val="C3E88D"/>
-                </a:solidFill>
-                <a:latin typeface="Consolas" pitchFamily="34" charset="0"/>
-                <a:ea typeface="Consolas" pitchFamily="34" charset="-122"/>
-                <a:cs typeface="Consolas" pitchFamily="34" charset="-120"/>
-              </a:rPr>
-              <a:t>'Aplikasi Pertama'</a:t>
-            </a:r>
-            <a:pPr indent="0" marL="0">
-              <a:lnSpc>
-                <a:spcPct val="105000"/>
-              </a:lnSpc>
-              <a:buNone/>
-            </a:pPr>
-            <a:r>
-              <a:rPr lang="en-US" sz="1400" dirty="0">
-                <a:solidFill>
-                  <a:srgbClr val="E6EDF3"/>
-                </a:solidFill>
-                <a:latin typeface="Consolas" pitchFamily="34" charset="0"/>
-                <a:ea typeface="Consolas" pitchFamily="34" charset="-122"/>
-                <a:cs typeface="Consolas" pitchFamily="34" charset="-120"/>
-              </a:rPr>
-              <a:t>,</a:t>
-            </a:r>
-            <a:endParaRPr lang="en-US" sz="1400" dirty="0"/>
-          </a:p>
-          <a:p>
-            <a:pPr indent="0" marL="0">
-              <a:lnSpc>
-                <a:spcPct val="105000"/>
-              </a:lnSpc>
-              <a:buNone/>
-            </a:pPr>
-            <a:r>
-              <a:rPr lang="en-US" sz="1400" dirty="0">
-                <a:solidFill>
-                  <a:srgbClr val="E6EDF3"/>
-                </a:solidFill>
-                <a:latin typeface="Consolas" pitchFamily="34" charset="0"/>
-                <a:ea typeface="Consolas" pitchFamily="34" charset="-122"/>
-                <a:cs typeface="Consolas" pitchFamily="34" charset="-120"/>
-              </a:rPr>
-              <a:t>      home: </a:t>
-            </a:r>
-            <a:pPr indent="0" marL="0">
-              <a:lnSpc>
-                <a:spcPct val="105000"/>
-              </a:lnSpc>
-              <a:buNone/>
-            </a:pPr>
-            <a:r>
-              <a:rPr lang="en-US" sz="1400" dirty="0">
-                <a:solidFill>
-                  <a:srgbClr val="FFCB6B"/>
-                </a:solidFill>
-                <a:latin typeface="Consolas" pitchFamily="34" charset="0"/>
-                <a:ea typeface="Consolas" pitchFamily="34" charset="-122"/>
-                <a:cs typeface="Consolas" pitchFamily="34" charset="-120"/>
-              </a:rPr>
-              <a:t>HalamanUtama</a:t>
-            </a:r>
-            <a:pPr indent="0" marL="0">
-              <a:lnSpc>
-                <a:spcPct val="105000"/>
-              </a:lnSpc>
-              <a:buNone/>
-            </a:pPr>
-            <a:r>
-              <a:rPr lang="en-US" sz="1400" dirty="0">
-                <a:solidFill>
-                  <a:srgbClr val="E6EDF3"/>
-                </a:solidFill>
-                <a:latin typeface="Consolas" pitchFamily="34" charset="0"/>
-                <a:ea typeface="Consolas" pitchFamily="34" charset="-122"/>
-                <a:cs typeface="Consolas" pitchFamily="34" charset="-120"/>
-              </a:rPr>
-              <a:t>(),</a:t>
-            </a:r>
-            <a:endParaRPr lang="en-US" sz="1400" dirty="0"/>
-          </a:p>
-          <a:p>
-            <a:pPr indent="0" marL="0">
-              <a:lnSpc>
-                <a:spcPct val="105000"/>
-              </a:lnSpc>
-              <a:buNone/>
-            </a:pPr>
-            <a:r>
-              <a:rPr lang="en-US" sz="1400" dirty="0">
-                <a:solidFill>
-                  <a:srgbClr val="E6EDF3"/>
-                </a:solidFill>
-                <a:latin typeface="Consolas" pitchFamily="34" charset="0"/>
-                <a:ea typeface="Consolas" pitchFamily="34" charset="-122"/>
-                <a:cs typeface="Consolas" pitchFamily="34" charset="-120"/>
-              </a:rPr>
-              <a:t>    );</a:t>
-            </a:r>
-            <a:endParaRPr lang="en-US" sz="1400" dirty="0"/>
-          </a:p>
-          <a:p>
-            <a:pPr indent="0" marL="0">
-              <a:lnSpc>
-                <a:spcPct val="105000"/>
-              </a:lnSpc>
-              <a:buNone/>
-            </a:pPr>
-            <a:r>
-              <a:rPr lang="en-US" sz="1400" dirty="0">
-                <a:solidFill>
-                  <a:srgbClr val="E6EDF3"/>
-                </a:solidFill>
-                <a:latin typeface="Consolas" pitchFamily="34" charset="0"/>
-                <a:ea typeface="Consolas" pitchFamily="34" charset="-122"/>
-                <a:cs typeface="Consolas" pitchFamily="34" charset="-120"/>
-              </a:rPr>
-              <a:t>  }</a:t>
-            </a:r>
-            <a:endParaRPr lang="en-US" sz="1400" dirty="0"/>
-          </a:p>
-          <a:p>
-            <a:pPr indent="0" marL="0">
-              <a:lnSpc>
-                <a:spcPct val="105000"/>
-              </a:lnSpc>
-              <a:buNone/>
-            </a:pPr>
-            <a:r>
-              <a:rPr lang="en-US" sz="1400" dirty="0">
-                <a:solidFill>
-                  <a:srgbClr val="E6EDF3"/>
-                </a:solidFill>
-                <a:latin typeface="Consolas" pitchFamily="34" charset="0"/>
-                <a:ea typeface="Consolas" pitchFamily="34" charset="-122"/>
-                <a:cs typeface="Consolas" pitchFamily="34" charset="-120"/>
-              </a:rPr>
-              <a:t>}</a:t>
-            </a:r>
-            <a:endParaRPr lang="en-US" sz="1400" dirty="0"/>
-          </a:p>
-          <a:p>
-            <a:pPr indent="0" marL="0">
-              <a:lnSpc>
-                <a:spcPct val="105000"/>
-              </a:lnSpc>
-              <a:buNone/>
-            </a:pPr>
-            <a:r>
-              <a:rPr lang="en-US" sz="1400" dirty="0">
-                <a:solidFill>
-                  <a:srgbClr val="E6EDF3"/>
-                </a:solidFill>
-                <a:latin typeface="Consolas" pitchFamily="34" charset="0"/>
-                <a:ea typeface="Consolas" pitchFamily="34" charset="-122"/>
-                <a:cs typeface="Consolas" pitchFamily="34" charset="-120"/>
-              </a:rPr>
-              <a:t> </a:t>
-            </a:r>
-            <a:endParaRPr lang="en-US" sz="1400" dirty="0"/>
-          </a:p>
-          <a:p>
-            <a:pPr indent="0" marL="0">
-              <a:lnSpc>
-                <a:spcPct val="105000"/>
-              </a:lnSpc>
-              <a:buNone/>
-            </a:pPr>
-            <a:r>
-              <a:rPr lang="en-US" sz="1400" i="1" dirty="0">
-                <a:solidFill>
-                  <a:srgbClr val="8FA3BC"/>
-                </a:solidFill>
-                <a:latin typeface="Consolas" pitchFamily="34" charset="0"/>
-                <a:ea typeface="Consolas" pitchFamily="34" charset="-122"/>
-                <a:cs typeface="Consolas" pitchFamily="34" charset="-120"/>
-              </a:rPr>
-              <a:t>// di dalam HalamanUtama.build():</a:t>
-            </a:r>
-            <a:endParaRPr lang="en-US" sz="1400" dirty="0"/>
-          </a:p>
-          <a:p>
-            <a:pPr indent="0" marL="0">
-              <a:lnSpc>
-                <a:spcPct val="105000"/>
-              </a:lnSpc>
-              <a:buNone/>
-            </a:pPr>
-            <a:r>
-              <a:rPr lang="en-US" sz="1400" dirty="0">
-                <a:solidFill>
-                  <a:srgbClr val="C792EA"/>
-                </a:solidFill>
-                <a:latin typeface="Consolas" pitchFamily="34" charset="0"/>
-                <a:ea typeface="Consolas" pitchFamily="34" charset="-122"/>
-                <a:cs typeface="Consolas" pitchFamily="34" charset="-120"/>
-              </a:rPr>
-              <a:t>return</a:t>
-            </a:r>
-            <a:pPr indent="0" marL="0">
-              <a:lnSpc>
-                <a:spcPct val="105000"/>
-              </a:lnSpc>
-              <a:buNone/>
-            </a:pPr>
-            <a:r>
-              <a:rPr lang="en-US" sz="1400" dirty="0">
-                <a:solidFill>
-                  <a:srgbClr val="E6EDF3"/>
-                </a:solidFill>
-                <a:latin typeface="Consolas" pitchFamily="34" charset="0"/>
-                <a:ea typeface="Consolas" pitchFamily="34" charset="-122"/>
-                <a:cs typeface="Consolas" pitchFamily="34" charset="-120"/>
-              </a:rPr>
-              <a:t> </a:t>
-            </a:r>
-            <a:pPr indent="0" marL="0">
-              <a:lnSpc>
-                <a:spcPct val="105000"/>
-              </a:lnSpc>
-              <a:buNone/>
-            </a:pPr>
-            <a:r>
-              <a:rPr lang="en-US" sz="1400" dirty="0">
-                <a:solidFill>
-                  <a:srgbClr val="FFCB6B"/>
-                </a:solidFill>
-                <a:latin typeface="Consolas" pitchFamily="34" charset="0"/>
-                <a:ea typeface="Consolas" pitchFamily="34" charset="-122"/>
-                <a:cs typeface="Consolas" pitchFamily="34" charset="-120"/>
-              </a:rPr>
-              <a:t>Scaffold</a:t>
-            </a:r>
-            <a:pPr indent="0" marL="0">
-              <a:lnSpc>
-                <a:spcPct val="105000"/>
-              </a:lnSpc>
-              <a:buNone/>
-            </a:pPr>
-            <a:r>
-              <a:rPr lang="en-US" sz="1400" dirty="0">
-                <a:solidFill>
-                  <a:srgbClr val="E6EDF3"/>
-                </a:solidFill>
-                <a:latin typeface="Consolas" pitchFamily="34" charset="0"/>
-                <a:ea typeface="Consolas" pitchFamily="34" charset="-122"/>
-                <a:cs typeface="Consolas" pitchFamily="34" charset="-120"/>
-              </a:rPr>
-              <a:t>(</a:t>
-            </a:r>
-            <a:endParaRPr lang="en-US" sz="1400" dirty="0"/>
-          </a:p>
-          <a:p>
-            <a:pPr indent="0" marL="0">
-              <a:lnSpc>
-                <a:spcPct val="105000"/>
-              </a:lnSpc>
-              <a:buNone/>
-            </a:pPr>
-            <a:r>
-              <a:rPr lang="en-US" sz="1400" dirty="0">
-                <a:solidFill>
-                  <a:srgbClr val="E6EDF3"/>
-                </a:solidFill>
-                <a:latin typeface="Consolas" pitchFamily="34" charset="0"/>
-                <a:ea typeface="Consolas" pitchFamily="34" charset="-122"/>
-                <a:cs typeface="Consolas" pitchFamily="34" charset="-120"/>
-              </a:rPr>
-              <a:t>  appBar: </a:t>
-            </a:r>
-            <a:pPr indent="0" marL="0">
-              <a:lnSpc>
-                <a:spcPct val="105000"/>
-              </a:lnSpc>
-              <a:buNone/>
-            </a:pPr>
-            <a:r>
-              <a:rPr lang="en-US" sz="1400" dirty="0">
-                <a:solidFill>
-                  <a:srgbClr val="FFCB6B"/>
-                </a:solidFill>
-                <a:latin typeface="Consolas" pitchFamily="34" charset="0"/>
-                <a:ea typeface="Consolas" pitchFamily="34" charset="-122"/>
-                <a:cs typeface="Consolas" pitchFamily="34" charset="-120"/>
-              </a:rPr>
-              <a:t>AppBar</a:t>
-            </a:r>
-            <a:pPr indent="0" marL="0">
-              <a:lnSpc>
-                <a:spcPct val="105000"/>
-              </a:lnSpc>
-              <a:buNone/>
-            </a:pPr>
-            <a:r>
-              <a:rPr lang="en-US" sz="1400" dirty="0">
-                <a:solidFill>
-                  <a:srgbClr val="E6EDF3"/>
-                </a:solidFill>
-                <a:latin typeface="Consolas" pitchFamily="34" charset="0"/>
-                <a:ea typeface="Consolas" pitchFamily="34" charset="-122"/>
-                <a:cs typeface="Consolas" pitchFamily="34" charset="-120"/>
-              </a:rPr>
-              <a:t>(title: </a:t>
-            </a:r>
-            <a:pPr indent="0" marL="0">
-              <a:lnSpc>
-                <a:spcPct val="105000"/>
-              </a:lnSpc>
-              <a:buNone/>
-            </a:pPr>
-            <a:r>
-              <a:rPr lang="en-US" sz="1400" dirty="0">
-                <a:solidFill>
-                  <a:srgbClr val="C792EA"/>
-                </a:solidFill>
-                <a:latin typeface="Consolas" pitchFamily="34" charset="0"/>
-                <a:ea typeface="Consolas" pitchFamily="34" charset="-122"/>
-                <a:cs typeface="Consolas" pitchFamily="34" charset="-120"/>
-              </a:rPr>
-              <a:t>const</a:t>
-            </a:r>
-            <a:pPr indent="0" marL="0">
-              <a:lnSpc>
-                <a:spcPct val="105000"/>
-              </a:lnSpc>
-              <a:buNone/>
-            </a:pPr>
-            <a:r>
-              <a:rPr lang="en-US" sz="1400" dirty="0">
-                <a:solidFill>
-                  <a:srgbClr val="E6EDF3"/>
-                </a:solidFill>
-                <a:latin typeface="Consolas" pitchFamily="34" charset="0"/>
-                <a:ea typeface="Consolas" pitchFamily="34" charset="-122"/>
-                <a:cs typeface="Consolas" pitchFamily="34" charset="-120"/>
-              </a:rPr>
-              <a:t> </a:t>
-            </a:r>
-            <a:pPr indent="0" marL="0">
-              <a:lnSpc>
-                <a:spcPct val="105000"/>
-              </a:lnSpc>
-              <a:buNone/>
-            </a:pPr>
-            <a:r>
-              <a:rPr lang="en-US" sz="1400" dirty="0">
-                <a:solidFill>
-                  <a:srgbClr val="FFCB6B"/>
-                </a:solidFill>
-                <a:latin typeface="Consolas" pitchFamily="34" charset="0"/>
-                <a:ea typeface="Consolas" pitchFamily="34" charset="-122"/>
-                <a:cs typeface="Consolas" pitchFamily="34" charset="-120"/>
-              </a:rPr>
-              <a:t>Text</a:t>
-            </a:r>
-            <a:pPr indent="0" marL="0">
-              <a:lnSpc>
-                <a:spcPct val="105000"/>
-              </a:lnSpc>
-              <a:buNone/>
-            </a:pPr>
-            <a:r>
-              <a:rPr lang="en-US" sz="1400" dirty="0">
-                <a:solidFill>
-                  <a:srgbClr val="E6EDF3"/>
-                </a:solidFill>
-                <a:latin typeface="Consolas" pitchFamily="34" charset="0"/>
-                <a:ea typeface="Consolas" pitchFamily="34" charset="-122"/>
-                <a:cs typeface="Consolas" pitchFamily="34" charset="-120"/>
-              </a:rPr>
-              <a:t>(</a:t>
-            </a:r>
-            <a:pPr indent="0" marL="0">
-              <a:lnSpc>
-                <a:spcPct val="105000"/>
-              </a:lnSpc>
-              <a:buNone/>
-            </a:pPr>
-            <a:r>
-              <a:rPr lang="en-US" sz="1400" dirty="0">
-                <a:solidFill>
-                  <a:srgbClr val="C3E88D"/>
-                </a:solidFill>
-                <a:latin typeface="Consolas" pitchFamily="34" charset="0"/>
-                <a:ea typeface="Consolas" pitchFamily="34" charset="-122"/>
-                <a:cs typeface="Consolas" pitchFamily="34" charset="-120"/>
-              </a:rPr>
-              <a:t>'Halo'</a:t>
-            </a:r>
-            <a:pPr indent="0" marL="0">
-              <a:lnSpc>
-                <a:spcPct val="105000"/>
-              </a:lnSpc>
-              <a:buNone/>
-            </a:pPr>
-            <a:r>
-              <a:rPr lang="en-US" sz="1400" dirty="0">
-                <a:solidFill>
-                  <a:srgbClr val="E6EDF3"/>
-                </a:solidFill>
-                <a:latin typeface="Consolas" pitchFamily="34" charset="0"/>
-                <a:ea typeface="Consolas" pitchFamily="34" charset="-122"/>
-                <a:cs typeface="Consolas" pitchFamily="34" charset="-120"/>
-              </a:rPr>
-              <a:t>)),</a:t>
-            </a:r>
-            <a:endParaRPr lang="en-US" sz="1400" dirty="0"/>
-          </a:p>
-          <a:p>
-            <a:pPr indent="0" marL="0">
-              <a:lnSpc>
-                <a:spcPct val="105000"/>
-              </a:lnSpc>
-              <a:buNone/>
-            </a:pPr>
-            <a:r>
-              <a:rPr lang="en-US" sz="1400" dirty="0">
-                <a:solidFill>
-                  <a:srgbClr val="E6EDF3"/>
-                </a:solidFill>
-                <a:latin typeface="Consolas" pitchFamily="34" charset="0"/>
-                <a:ea typeface="Consolas" pitchFamily="34" charset="-122"/>
-                <a:cs typeface="Consolas" pitchFamily="34" charset="-120"/>
-              </a:rPr>
-              <a:t>  body: </a:t>
-            </a:r>
-            <a:pPr indent="0" marL="0">
-              <a:lnSpc>
-                <a:spcPct val="105000"/>
-              </a:lnSpc>
-              <a:buNone/>
-            </a:pPr>
-            <a:r>
-              <a:rPr lang="en-US" sz="1400" dirty="0">
-                <a:solidFill>
-                  <a:srgbClr val="C792EA"/>
-                </a:solidFill>
-                <a:latin typeface="Consolas" pitchFamily="34" charset="0"/>
-                <a:ea typeface="Consolas" pitchFamily="34" charset="-122"/>
-                <a:cs typeface="Consolas" pitchFamily="34" charset="-120"/>
-              </a:rPr>
-              <a:t>const</a:t>
-            </a:r>
-            <a:pPr indent="0" marL="0">
-              <a:lnSpc>
-                <a:spcPct val="105000"/>
-              </a:lnSpc>
-              <a:buNone/>
-            </a:pPr>
-            <a:r>
-              <a:rPr lang="en-US" sz="1400" dirty="0">
-                <a:solidFill>
-                  <a:srgbClr val="E6EDF3"/>
-                </a:solidFill>
-                <a:latin typeface="Consolas" pitchFamily="34" charset="0"/>
-                <a:ea typeface="Consolas" pitchFamily="34" charset="-122"/>
-                <a:cs typeface="Consolas" pitchFamily="34" charset="-120"/>
-              </a:rPr>
-              <a:t> </a:t>
-            </a:r>
-            <a:pPr indent="0" marL="0">
-              <a:lnSpc>
-                <a:spcPct val="105000"/>
-              </a:lnSpc>
-              <a:buNone/>
-            </a:pPr>
-            <a:r>
-              <a:rPr lang="en-US" sz="1400" dirty="0">
-                <a:solidFill>
-                  <a:srgbClr val="FFCB6B"/>
-                </a:solidFill>
-                <a:latin typeface="Consolas" pitchFamily="34" charset="0"/>
-                <a:ea typeface="Consolas" pitchFamily="34" charset="-122"/>
-                <a:cs typeface="Consolas" pitchFamily="34" charset="-120"/>
-              </a:rPr>
-              <a:t>Center</a:t>
-            </a:r>
-            <a:pPr indent="0" marL="0">
-              <a:lnSpc>
-                <a:spcPct val="105000"/>
-              </a:lnSpc>
-              <a:buNone/>
-            </a:pPr>
-            <a:r>
-              <a:rPr lang="en-US" sz="1400" dirty="0">
-                <a:solidFill>
-                  <a:srgbClr val="E6EDF3"/>
-                </a:solidFill>
-                <a:latin typeface="Consolas" pitchFamily="34" charset="0"/>
-                <a:ea typeface="Consolas" pitchFamily="34" charset="-122"/>
-                <a:cs typeface="Consolas" pitchFamily="34" charset="-120"/>
-              </a:rPr>
-              <a:t>(child: </a:t>
-            </a:r>
-            <a:pPr indent="0" marL="0">
-              <a:lnSpc>
-                <a:spcPct val="105000"/>
-              </a:lnSpc>
-              <a:buNone/>
-            </a:pPr>
-            <a:r>
-              <a:rPr lang="en-US" sz="1400" dirty="0">
-                <a:solidFill>
-                  <a:srgbClr val="FFCB6B"/>
-                </a:solidFill>
-                <a:latin typeface="Consolas" pitchFamily="34" charset="0"/>
-                <a:ea typeface="Consolas" pitchFamily="34" charset="-122"/>
-                <a:cs typeface="Consolas" pitchFamily="34" charset="-120"/>
-              </a:rPr>
-              <a:t>Text</a:t>
-            </a:r>
-            <a:pPr indent="0" marL="0">
-              <a:lnSpc>
-                <a:spcPct val="105000"/>
-              </a:lnSpc>
-              <a:buNone/>
-            </a:pPr>
-            <a:r>
-              <a:rPr lang="en-US" sz="1400" dirty="0">
-                <a:solidFill>
-                  <a:srgbClr val="E6EDF3"/>
-                </a:solidFill>
-                <a:latin typeface="Consolas" pitchFamily="34" charset="0"/>
-                <a:ea typeface="Consolas" pitchFamily="34" charset="-122"/>
-                <a:cs typeface="Consolas" pitchFamily="34" charset="-120"/>
-              </a:rPr>
-              <a:t>(</a:t>
-            </a:r>
-            <a:pPr indent="0" marL="0">
-              <a:lnSpc>
-                <a:spcPct val="105000"/>
-              </a:lnSpc>
-              <a:buNone/>
-            </a:pPr>
-            <a:r>
-              <a:rPr lang="en-US" sz="1400" dirty="0">
-                <a:solidFill>
-                  <a:srgbClr val="C3E88D"/>
-                </a:solidFill>
-                <a:latin typeface="Consolas" pitchFamily="34" charset="0"/>
-                <a:ea typeface="Consolas" pitchFamily="34" charset="-122"/>
-                <a:cs typeface="Consolas" pitchFamily="34" charset="-120"/>
-              </a:rPr>
               <a:t>'Isi'</a:t>
             </a:r>
-            <a:pPr indent="0" marL="0">
-              <a:lnSpc>
-                <a:spcPct val="105000"/>
-              </a:lnSpc>
-              <a:buNone/>
-            </a:pPr>
             <a:r>
               <a:rPr lang="en-US" sz="1400" dirty="0">
                 <a:solidFill>
@@ -15083,6 +14603,31 @@
               </a:rPr>
               <a:t>theme: </a:t>
             </a:r>
+            <a:r>
+              <a:rPr lang="en-US" sz="1500" dirty="0">
+                <a:solidFill>
+                  <a:srgbClr val="FFCB6B"/>
+                </a:solidFill>
+                <a:latin typeface="Consolas" pitchFamily="34" charset="0"/>
+                <a:ea typeface="Consolas" pitchFamily="34" charset="-122"/>
+                <a:cs typeface="Consolas" pitchFamily="34" charset="-120"/>
+              </a:rPr>
+              <a:t>ThemeData</a:t>
+            </a:r>
+            <a:r>
+              <a:rPr lang="en-US" sz="1500" dirty="0">
+                <a:solidFill>
+                  <a:srgbClr val="E6EDF3"/>
+                </a:solidFill>
+                <a:latin typeface="Consolas" pitchFamily="34" charset="0"/>
+                <a:ea typeface="Consolas" pitchFamily="34" charset="-122"/>
+                <a:cs typeface="Consolas" pitchFamily="34" charset="-120"/>
+              </a:rPr>
+              <a:t>(</a:t>
+            </a:r>
+            <a:endParaRPr lang="en-US" sz="1500" dirty="0"/>
+          </a:p>
+          <a:p>
             <a:pPr indent="0" marL="0">
               <a:lnSpc>
                 <a:spcPct val="105000"/>
@@ -15092,14 +14637,39 @@
             <a:r>
               <a:rPr lang="en-US" sz="1500" dirty="0">
                 <a:solidFill>
-                  <a:srgbClr val="FFCB6B"/>
+                  <a:srgbClr val="E6EDF3"/>
                 </a:solidFill>
                 <a:latin typeface="Consolas" pitchFamily="34" charset="0"/>
                 <a:ea typeface="Consolas" pitchFamily="34" charset="-122"/>
                 <a:cs typeface="Consolas" pitchFamily="34" charset="-120"/>
               </a:rPr>
-              <a:t>ThemeData</a:t>
-            </a:r>
+              <a:t>  colorScheme: </a:t>
+            </a:r>
+            <a:r>
+              <a:rPr lang="en-US" sz="1500" dirty="0">
+                <a:solidFill>
+                  <a:srgbClr val="FFCB6B"/>
+                </a:solidFill>
+                <a:latin typeface="Consolas" pitchFamily="34" charset="0"/>
+                <a:ea typeface="Consolas" pitchFamily="34" charset="-122"/>
+                <a:cs typeface="Consolas" pitchFamily="34" charset="-120"/>
+              </a:rPr>
+              <a:t>ColorScheme</a:t>
+            </a:r>
+            <a:r>
+              <a:rPr lang="en-US" sz="1500" dirty="0">
+                <a:solidFill>
+                  <a:srgbClr val="E6EDF3"/>
+                </a:solidFill>
+                <a:latin typeface="Consolas" pitchFamily="34" charset="0"/>
+                <a:ea typeface="Consolas" pitchFamily="34" charset="-122"/>
+                <a:cs typeface="Consolas" pitchFamily="34" charset="-120"/>
+              </a:rPr>
+              <a:t>.fromSeed(</a:t>
+            </a:r>
+            <a:endParaRPr lang="en-US" sz="1500" dirty="0"/>
+          </a:p>
+          <a:p>
             <a:pPr indent="0" marL="0">
               <a:lnSpc>
                 <a:spcPct val="105000"/>
@@ -15115,7 +14685,40 @@
                 <a:ea typeface="Consolas" pitchFamily="34" charset="-122"/>
                 <a:cs typeface="Consolas" pitchFamily="34" charset="-120"/>
               </a:rPr>
-              <a:t>(</a:t>
+              <a:t>    seedColor: </a:t>
+            </a:r>
+            <a:r>
+              <a:rPr lang="en-US" sz="1500" dirty="0">
+                <a:solidFill>
+                  <a:srgbClr val="FFCB6B"/>
+                </a:solidFill>
+                <a:latin typeface="Consolas" pitchFamily="34" charset="0"/>
+                <a:ea typeface="Consolas" pitchFamily="34" charset="-122"/>
+                <a:cs typeface="Consolas" pitchFamily="34" charset="-120"/>
+              </a:rPr>
+              <a:t>Colors</a:t>
+            </a:r>
+            <a:r>
+              <a:rPr lang="en-US" sz="1500" dirty="0">
+                <a:solidFill>
+                  <a:srgbClr val="E6EDF3"/>
+                </a:solidFill>
+                <a:latin typeface="Consolas" pitchFamily="34" charset="0"/>
+                <a:ea typeface="Consolas" pitchFamily="34" charset="-122"/>
+                <a:cs typeface="Consolas" pitchFamily="34" charset="-120"/>
+              </a:rPr>
+              <a:t>.indigo, </a:t>
+            </a:r>
+            <a:r>
+              <a:rPr lang="en-US" sz="1500" i="1" dirty="0">
+                <a:solidFill>
+                  <a:srgbClr val="8FA3BC"/>
+                </a:solidFill>
+                <a:latin typeface="Consolas" pitchFamily="34" charset="0"/>
+                <a:ea typeface="Consolas" pitchFamily="34" charset="-122"/>
+                <a:cs typeface="Consolas" pitchFamily="34" charset="-120"/>
+              </a:rPr>
+              <a:t>// warna benih</a:t>
             </a:r>
             <a:endParaRPr lang="en-US" sz="1500" dirty="0"/>
           </a:p>
@@ -15135,8 +14738,11 @@
                 <a:ea typeface="Consolas" pitchFamily="34" charset="-122"/>
                 <a:cs typeface="Consolas" pitchFamily="34" charset="-120"/>
               </a:rPr>
-              <a:t>  colorScheme: </a:t>
-            </a:r>
+              <a:t>  ),</a:t>
+            </a:r>
+            <a:endParaRPr lang="en-US" sz="1500" dirty="0"/>
+          </a:p>
+          <a:p>
             <a:pPr indent="0" marL="0">
               <a:lnSpc>
                 <a:spcPct val="105000"/>
@@ -15146,14 +14752,17 @@
             <a:r>
               <a:rPr lang="en-US" sz="1500" dirty="0">
                 <a:solidFill>
-                  <a:srgbClr val="FFCB6B"/>
+                  <a:srgbClr val="E6EDF3"/>
                 </a:solidFill>
                 <a:latin typeface="Consolas" pitchFamily="34" charset="0"/>
                 <a:ea typeface="Consolas" pitchFamily="34" charset="-122"/>
                 <a:cs typeface="Consolas" pitchFamily="34" charset="-120"/>
               </a:rPr>
-              <a:t>ColorScheme</a:t>
-            </a:r>
+              <a:t>),</a:t>
+            </a:r>
+            <a:endParaRPr lang="en-US" sz="1500" dirty="0"/>
+          </a:p>
+          <a:p>
             <a:pPr indent="0" marL="0">
               <a:lnSpc>
                 <a:spcPct val="105000"/>
@@ -15169,7 +14778,7 @@
                 <a:ea typeface="Consolas" pitchFamily="34" charset="-122"/>
                 <a:cs typeface="Consolas" pitchFamily="34" charset="-120"/>
               </a:rPr>
-              <a:t>.fromSeed(</a:t>
+              <a:t> </a:t>
             </a:r>
             <a:endParaRPr lang="en-US" sz="1500" dirty="0"/>
           </a:p>
@@ -15181,16 +14790,19 @@
               <a:buNone/>
             </a:pPr>
             <a:r>
-              <a:rPr lang="en-US" sz="1500" dirty="0">
-                <a:solidFill>
-                  <a:srgbClr val="E6EDF3"/>
+              <a:rPr lang="en-US" sz="1500" i="1" dirty="0">
+                <a:solidFill>
+                  <a:srgbClr val="8FA3BC"/>
                 </a:solidFill>
                 <a:latin typeface="Consolas" pitchFamily="34" charset="0"/>
                 <a:ea typeface="Consolas" pitchFamily="34" charset="-122"/>
                 <a:cs typeface="Consolas" pitchFamily="34" charset="-120"/>
               </a:rPr>
-              <a:t>    seedColor: </a:t>
-            </a:r>
+              <a:t>// memakai warna &amp; gaya teks dari tema</a:t>
+            </a:r>
+            <a:endParaRPr lang="en-US" sz="1500" dirty="0"/>
+          </a:p>
+          <a:p>
             <a:pPr indent="0" marL="0">
               <a:lnSpc>
                 <a:spcPct val="105000"/>
@@ -15200,14 +14812,50 @@
             <a:r>
               <a:rPr lang="en-US" sz="1500" dirty="0">
                 <a:solidFill>
-                  <a:srgbClr val="FFCB6B"/>
+                  <a:srgbClr val="C792EA"/>
                 </a:solidFill>
                 <a:latin typeface="Consolas" pitchFamily="34" charset="0"/>
                 <a:ea typeface="Consolas" pitchFamily="34" charset="-122"/>
                 <a:cs typeface="Consolas" pitchFamily="34" charset="-120"/>
               </a:rPr>
-              <a:t>Colors</a:t>
-            </a:r>
+              <a:t>final</a:t>
+            </a:r>
+            <a:r>
+              <a:rPr lang="en-US" sz="1500" dirty="0">
+                <a:solidFill>
+                  <a:srgbClr val="E6EDF3"/>
+                </a:solidFill>
+                <a:latin typeface="Consolas" pitchFamily="34" charset="0"/>
+                <a:ea typeface="Consolas" pitchFamily="34" charset="-122"/>
+                <a:cs typeface="Consolas" pitchFamily="34" charset="-120"/>
+              </a:rPr>
+              <a:t> </a:t>
+            </a:r>
+            <a:r>
+              <a:rPr lang="en-US" sz="1500" dirty="0">
+                <a:solidFill>
+                  <a:srgbClr val="FFCB6B"/>
+                </a:solidFill>
+                <a:latin typeface="Consolas" pitchFamily="34" charset="0"/>
+                <a:ea typeface="Consolas" pitchFamily="34" charset="-122"/>
+                <a:cs typeface="Consolas" pitchFamily="34" charset="-120"/>
+              </a:rPr>
+              <a:t>ColorScheme</a:t>
+            </a:r>
+            <a:r>
+              <a:rPr lang="en-US" sz="1500" dirty="0">
+                <a:solidFill>
+                  <a:srgbClr val="E6EDF3"/>
+                </a:solidFill>
+                <a:latin typeface="Consolas" pitchFamily="34" charset="0"/>
+                <a:ea typeface="Consolas" pitchFamily="34" charset="-122"/>
+                <a:cs typeface="Consolas" pitchFamily="34" charset="-120"/>
+              </a:rPr>
+              <a:t> warna =</a:t>
+            </a:r>
+            <a:endParaRPr lang="en-US" sz="1500" dirty="0"/>
+          </a:p>
+          <a:p>
             <a:pPr indent="0" marL="0">
               <a:lnSpc>
                 <a:spcPct val="105000"/>
@@ -15223,8 +14871,33 @@
                 <a:ea typeface="Consolas" pitchFamily="34" charset="-122"/>
                 <a:cs typeface="Consolas" pitchFamily="34" charset="-120"/>
               </a:rPr>
-              <a:t>.indigo, </a:t>
-            </a:r>
+              <a:t>    </a:t>
+            </a:r>
+            <a:r>
+              <a:rPr lang="en-US" sz="1500" dirty="0">
+                <a:solidFill>
+                  <a:srgbClr val="FFCB6B"/>
+                </a:solidFill>
+                <a:latin typeface="Consolas" pitchFamily="34" charset="0"/>
+                <a:ea typeface="Consolas" pitchFamily="34" charset="-122"/>
+                <a:cs typeface="Consolas" pitchFamily="34" charset="-120"/>
+              </a:rPr>
+              <a:t>Theme</a:t>
+            </a:r>
+            <a:r>
+              <a:rPr lang="en-US" sz="1500" dirty="0">
+                <a:solidFill>
+                  <a:srgbClr val="E6EDF3"/>
+                </a:solidFill>
+                <a:latin typeface="Consolas" pitchFamily="34" charset="0"/>
+                <a:ea typeface="Consolas" pitchFamily="34" charset="-122"/>
+                <a:cs typeface="Consolas" pitchFamily="34" charset="-120"/>
+              </a:rPr>
+              <a:t>.of(context).colorScheme;</a:t>
+            </a:r>
+            <a:endParaRPr lang="en-US" sz="1500" dirty="0"/>
+          </a:p>
+          <a:p>
             <a:pPr indent="0" marL="0">
               <a:lnSpc>
                 <a:spcPct val="105000"/>
@@ -15232,15 +14905,48 @@
               <a:buNone/>
             </a:pPr>
             <a:r>
-              <a:rPr lang="en-US" sz="1500" i="1" dirty="0">
-                <a:solidFill>
-                  <a:srgbClr val="8FA3BC"/>
+              <a:rPr lang="en-US" sz="1500" dirty="0">
+                <a:solidFill>
+                  <a:srgbClr val="C792EA"/>
                 </a:solidFill>
                 <a:latin typeface="Consolas" pitchFamily="34" charset="0"/>
                 <a:ea typeface="Consolas" pitchFamily="34" charset="-122"/>
                 <a:cs typeface="Consolas" pitchFamily="34" charset="-120"/>
               </a:rPr>
-              <a:t>// warna benih</a:t>
+              <a:t>final</a:t>
+            </a:r>
+            <a:r>
+              <a:rPr lang="en-US" sz="1500" dirty="0">
+                <a:solidFill>
+                  <a:srgbClr val="E6EDF3"/>
+                </a:solidFill>
+                <a:latin typeface="Consolas" pitchFamily="34" charset="0"/>
+                <a:ea typeface="Consolas" pitchFamily="34" charset="-122"/>
+                <a:cs typeface="Consolas" pitchFamily="34" charset="-120"/>
+              </a:rPr>
+              <a:t> </a:t>
+            </a:r>
+            <a:r>
+              <a:rPr lang="en-US" sz="1500" dirty="0">
+                <a:solidFill>
+                  <a:srgbClr val="FFCB6B"/>
+                </a:solidFill>
+                <a:latin typeface="Consolas" pitchFamily="34" charset="0"/>
+                <a:ea typeface="Consolas" pitchFamily="34" charset="-122"/>
+                <a:cs typeface="Consolas" pitchFamily="34" charset="-120"/>
+              </a:rPr>
+              <a:t>TextTheme</a:t>
+            </a:r>
+            <a:r>
+              <a:rPr lang="en-US" sz="1500" dirty="0">
+                <a:solidFill>
+                  <a:srgbClr val="E6EDF3"/>
+                </a:solidFill>
+                <a:latin typeface="Consolas" pitchFamily="34" charset="0"/>
+                <a:ea typeface="Consolas" pitchFamily="34" charset="-122"/>
+                <a:cs typeface="Consolas" pitchFamily="34" charset="-120"/>
+              </a:rPr>
+              <a:t> gayaTeks =</a:t>
             </a:r>
             <a:endParaRPr lang="en-US" sz="1500" dirty="0"/>
           </a:p>
@@ -15260,7 +14966,29 @@
                 <a:ea typeface="Consolas" pitchFamily="34" charset="-122"/>
                 <a:cs typeface="Consolas" pitchFamily="34" charset="-120"/>
               </a:rPr>
-              <a:t>  ),</a:t>
+              <a:t>    </a:t>
+            </a:r>
+            <a:r>
+              <a:rPr lang="en-US" sz="1500" dirty="0">
+                <a:solidFill>
+                  <a:srgbClr val="FFCB6B"/>
+                </a:solidFill>
+                <a:latin typeface="Consolas" pitchFamily="34" charset="0"/>
+                <a:ea typeface="Consolas" pitchFamily="34" charset="-122"/>
+                <a:cs typeface="Consolas" pitchFamily="34" charset="-120"/>
+              </a:rPr>
+              <a:t>Theme</a:t>
+            </a:r>
+            <a:r>
+              <a:rPr lang="en-US" sz="1500" dirty="0">
+                <a:solidFill>
+                  <a:srgbClr val="E6EDF3"/>
+                </a:solidFill>
+                <a:latin typeface="Consolas" pitchFamily="34" charset="0"/>
+                <a:ea typeface="Consolas" pitchFamily="34" charset="-122"/>
+                <a:cs typeface="Consolas" pitchFamily="34" charset="-120"/>
+              </a:rPr>
+              <a:t>.of(context).textTheme;</a:t>
             </a:r>
             <a:endParaRPr lang="en-US" sz="1500" dirty="0"/>
           </a:p>
@@ -15280,7 +15008,7 @@
                 <a:ea typeface="Consolas" pitchFamily="34" charset="-122"/>
                 <a:cs typeface="Consolas" pitchFamily="34" charset="-120"/>
               </a:rPr>
-              <a:t>),</a:t>
+              <a:t> </a:t>
             </a:r>
             <a:endParaRPr lang="en-US" sz="1500" dirty="0"/>
           </a:p>
@@ -15294,364 +15022,36 @@
             <a:r>
               <a:rPr lang="en-US" sz="1500" dirty="0">
                 <a:solidFill>
-                  <a:srgbClr val="E6EDF3"/>
+                  <a:srgbClr val="FFCB6B"/>
                 </a:solidFill>
                 <a:latin typeface="Consolas" pitchFamily="34" charset="0"/>
                 <a:ea typeface="Consolas" pitchFamily="34" charset="-122"/>
                 <a:cs typeface="Consolas" pitchFamily="34" charset="-120"/>
               </a:rPr>
-              <a:t> </a:t>
-            </a:r>
-            <a:endParaRPr lang="en-US" sz="1500" dirty="0"/>
-          </a:p>
-          <a:p>
-            <a:pPr indent="0" marL="0">
-              <a:lnSpc>
-                <a:spcPct val="105000"/>
-              </a:lnSpc>
-              <a:buNone/>
-            </a:pPr>
-            <a:r>
-              <a:rPr lang="en-US" sz="1500" i="1" dirty="0">
-                <a:solidFill>
-                  <a:srgbClr val="8FA3BC"/>
+              <a:t>Text</a:t>
+            </a:r>
+            <a:r>
+              <a:rPr lang="en-US" sz="1500" dirty="0">
+                <a:solidFill>
+                  <a:srgbClr val="E6EDF3"/>
                 </a:solidFill>
                 <a:latin typeface="Consolas" pitchFamily="34" charset="0"/>
                 <a:ea typeface="Consolas" pitchFamily="34" charset="-122"/>
                 <a:cs typeface="Consolas" pitchFamily="34" charset="-120"/>
               </a:rPr>
-              <a:t>// memakai warna &amp; gaya teks dari tema</a:t>
-            </a:r>
-            <a:endParaRPr lang="en-US" sz="1500" dirty="0"/>
-          </a:p>
-          <a:p>
-            <a:pPr indent="0" marL="0">
-              <a:lnSpc>
-                <a:spcPct val="105000"/>
-              </a:lnSpc>
-              <a:buNone/>
-            </a:pPr>
+              <a:t>(</a:t>
+            </a:r>
             <a:r>
               <a:rPr lang="en-US" sz="1500" dirty="0">
                 <a:solidFill>
-                  <a:srgbClr val="C792EA"/>
+                  <a:srgbClr val="C3E88D"/>
                 </a:solidFill>
                 <a:latin typeface="Consolas" pitchFamily="34" charset="0"/>
                 <a:ea typeface="Consolas" pitchFamily="34" charset="-122"/>
                 <a:cs typeface="Consolas" pitchFamily="34" charset="-120"/>
               </a:rPr>
-              <a:t>final</a:t>
-            </a:r>
-            <a:pPr indent="0" marL="0">
-              <a:lnSpc>
-                <a:spcPct val="105000"/>
-              </a:lnSpc>
-              <a:buNone/>
-            </a:pPr>
-            <a:r>
-              <a:rPr lang="en-US" sz="1500" dirty="0">
-                <a:solidFill>
-                  <a:srgbClr val="E6EDF3"/>
-                </a:solidFill>
-                <a:latin typeface="Consolas" pitchFamily="34" charset="0"/>
-                <a:ea typeface="Consolas" pitchFamily="34" charset="-122"/>
-                <a:cs typeface="Consolas" pitchFamily="34" charset="-120"/>
-              </a:rPr>
-              <a:t> </a:t>
-            </a:r>
-            <a:pPr indent="0" marL="0">
-              <a:lnSpc>
-                <a:spcPct val="105000"/>
-              </a:lnSpc>
-              <a:buNone/>
-            </a:pPr>
-            <a:r>
-              <a:rPr lang="en-US" sz="1500" dirty="0">
-                <a:solidFill>
-                  <a:srgbClr val="FFCB6B"/>
-                </a:solidFill>
-                <a:latin typeface="Consolas" pitchFamily="34" charset="0"/>
-                <a:ea typeface="Consolas" pitchFamily="34" charset="-122"/>
-                <a:cs typeface="Consolas" pitchFamily="34" charset="-120"/>
-              </a:rPr>
-              <a:t>ColorScheme</a:t>
-            </a:r>
-            <a:pPr indent="0" marL="0">
-              <a:lnSpc>
-                <a:spcPct val="105000"/>
-              </a:lnSpc>
-              <a:buNone/>
-            </a:pPr>
-            <a:r>
-              <a:rPr lang="en-US" sz="1500" dirty="0">
-                <a:solidFill>
-                  <a:srgbClr val="E6EDF3"/>
-                </a:solidFill>
-                <a:latin typeface="Consolas" pitchFamily="34" charset="0"/>
-                <a:ea typeface="Consolas" pitchFamily="34" charset="-122"/>
-                <a:cs typeface="Consolas" pitchFamily="34" charset="-120"/>
-              </a:rPr>
-              <a:t> warna =</a:t>
-            </a:r>
-            <a:endParaRPr lang="en-US" sz="1500" dirty="0"/>
-          </a:p>
-          <a:p>
-            <a:pPr indent="0" marL="0">
-              <a:lnSpc>
-                <a:spcPct val="105000"/>
-              </a:lnSpc>
-              <a:buNone/>
-            </a:pPr>
-            <a:r>
-              <a:rPr lang="en-US" sz="1500" dirty="0">
-                <a:solidFill>
-                  <a:srgbClr val="E6EDF3"/>
-                </a:solidFill>
-                <a:latin typeface="Consolas" pitchFamily="34" charset="0"/>
-                <a:ea typeface="Consolas" pitchFamily="34" charset="-122"/>
-                <a:cs typeface="Consolas" pitchFamily="34" charset="-120"/>
-              </a:rPr>
-              <a:t>    </a:t>
-            </a:r>
-            <a:pPr indent="0" marL="0">
-              <a:lnSpc>
-                <a:spcPct val="105000"/>
-              </a:lnSpc>
-              <a:buNone/>
-            </a:pPr>
-            <a:r>
-              <a:rPr lang="en-US" sz="1500" dirty="0">
-                <a:solidFill>
-                  <a:srgbClr val="FFCB6B"/>
-                </a:solidFill>
-                <a:latin typeface="Consolas" pitchFamily="34" charset="0"/>
-                <a:ea typeface="Consolas" pitchFamily="34" charset="-122"/>
-                <a:cs typeface="Consolas" pitchFamily="34" charset="-120"/>
-              </a:rPr>
-              <a:t>Theme</a:t>
-            </a:r>
-            <a:pPr indent="0" marL="0">
-              <a:lnSpc>
-                <a:spcPct val="105000"/>
-              </a:lnSpc>
-              <a:buNone/>
-            </a:pPr>
-            <a:r>
-              <a:rPr lang="en-US" sz="1500" dirty="0">
-                <a:solidFill>
-                  <a:srgbClr val="E6EDF3"/>
-                </a:solidFill>
-                <a:latin typeface="Consolas" pitchFamily="34" charset="0"/>
-                <a:ea typeface="Consolas" pitchFamily="34" charset="-122"/>
-                <a:cs typeface="Consolas" pitchFamily="34" charset="-120"/>
-              </a:rPr>
-              <a:t>.of(context).colorScheme;</a:t>
-            </a:r>
-            <a:endParaRPr lang="en-US" sz="1500" dirty="0"/>
-          </a:p>
-          <a:p>
-            <a:pPr indent="0" marL="0">
-              <a:lnSpc>
-                <a:spcPct val="105000"/>
-              </a:lnSpc>
-              <a:buNone/>
-            </a:pPr>
-            <a:r>
-              <a:rPr lang="en-US" sz="1500" dirty="0">
-                <a:solidFill>
-                  <a:srgbClr val="C792EA"/>
-                </a:solidFill>
-                <a:latin typeface="Consolas" pitchFamily="34" charset="0"/>
-                <a:ea typeface="Consolas" pitchFamily="34" charset="-122"/>
-                <a:cs typeface="Consolas" pitchFamily="34" charset="-120"/>
-              </a:rPr>
-              <a:t>final</a:t>
-            </a:r>
-            <a:pPr indent="0" marL="0">
-              <a:lnSpc>
-                <a:spcPct val="105000"/>
-              </a:lnSpc>
-              <a:buNone/>
-            </a:pPr>
-            <a:r>
-              <a:rPr lang="en-US" sz="1500" dirty="0">
-                <a:solidFill>
-                  <a:srgbClr val="E6EDF3"/>
-                </a:solidFill>
-                <a:latin typeface="Consolas" pitchFamily="34" charset="0"/>
-                <a:ea typeface="Consolas" pitchFamily="34" charset="-122"/>
-                <a:cs typeface="Consolas" pitchFamily="34" charset="-120"/>
-              </a:rPr>
-              <a:t> </a:t>
-            </a:r>
-            <a:pPr indent="0" marL="0">
-              <a:lnSpc>
-                <a:spcPct val="105000"/>
-              </a:lnSpc>
-              <a:buNone/>
-            </a:pPr>
-            <a:r>
-              <a:rPr lang="en-US" sz="1500" dirty="0">
-                <a:solidFill>
-                  <a:srgbClr val="FFCB6B"/>
-                </a:solidFill>
-                <a:latin typeface="Consolas" pitchFamily="34" charset="0"/>
-                <a:ea typeface="Consolas" pitchFamily="34" charset="-122"/>
-                <a:cs typeface="Consolas" pitchFamily="34" charset="-120"/>
-              </a:rPr>
-              <a:t>TextTheme</a:t>
-            </a:r>
-            <a:pPr indent="0" marL="0">
-              <a:lnSpc>
-                <a:spcPct val="105000"/>
-              </a:lnSpc>
-              <a:buNone/>
-            </a:pPr>
-            <a:r>
-              <a:rPr lang="en-US" sz="1500" dirty="0">
-                <a:solidFill>
-                  <a:srgbClr val="E6EDF3"/>
-                </a:solidFill>
-                <a:latin typeface="Consolas" pitchFamily="34" charset="0"/>
-                <a:ea typeface="Consolas" pitchFamily="34" charset="-122"/>
-                <a:cs typeface="Consolas" pitchFamily="34" charset="-120"/>
-              </a:rPr>
-              <a:t> gayaTeks =</a:t>
-            </a:r>
-            <a:endParaRPr lang="en-US" sz="1500" dirty="0"/>
-          </a:p>
-          <a:p>
-            <a:pPr indent="0" marL="0">
-              <a:lnSpc>
-                <a:spcPct val="105000"/>
-              </a:lnSpc>
-              <a:buNone/>
-            </a:pPr>
-            <a:r>
-              <a:rPr lang="en-US" sz="1500" dirty="0">
-                <a:solidFill>
-                  <a:srgbClr val="E6EDF3"/>
-                </a:solidFill>
-                <a:latin typeface="Consolas" pitchFamily="34" charset="0"/>
-                <a:ea typeface="Consolas" pitchFamily="34" charset="-122"/>
-                <a:cs typeface="Consolas" pitchFamily="34" charset="-120"/>
-              </a:rPr>
-              <a:t>    </a:t>
-            </a:r>
-            <a:pPr indent="0" marL="0">
-              <a:lnSpc>
-                <a:spcPct val="105000"/>
-              </a:lnSpc>
-              <a:buNone/>
-            </a:pPr>
-            <a:r>
-              <a:rPr lang="en-US" sz="1500" dirty="0">
-                <a:solidFill>
-                  <a:srgbClr val="FFCB6B"/>
-                </a:solidFill>
-                <a:latin typeface="Consolas" pitchFamily="34" charset="0"/>
-                <a:ea typeface="Consolas" pitchFamily="34" charset="-122"/>
-                <a:cs typeface="Consolas" pitchFamily="34" charset="-120"/>
-              </a:rPr>
-              <a:t>Theme</a:t>
-            </a:r>
-            <a:pPr indent="0" marL="0">
-              <a:lnSpc>
-                <a:spcPct val="105000"/>
-              </a:lnSpc>
-              <a:buNone/>
-            </a:pPr>
-            <a:r>
-              <a:rPr lang="en-US" sz="1500" dirty="0">
-                <a:solidFill>
-                  <a:srgbClr val="E6EDF3"/>
-                </a:solidFill>
-                <a:latin typeface="Consolas" pitchFamily="34" charset="0"/>
-                <a:ea typeface="Consolas" pitchFamily="34" charset="-122"/>
-                <a:cs typeface="Consolas" pitchFamily="34" charset="-120"/>
-              </a:rPr>
-              <a:t>.of(context).textTheme;</a:t>
-            </a:r>
-            <a:endParaRPr lang="en-US" sz="1500" dirty="0"/>
-          </a:p>
-          <a:p>
-            <a:pPr indent="0" marL="0">
-              <a:lnSpc>
-                <a:spcPct val="105000"/>
-              </a:lnSpc>
-              <a:buNone/>
-            </a:pPr>
-            <a:r>
-              <a:rPr lang="en-US" sz="1500" dirty="0">
-                <a:solidFill>
-                  <a:srgbClr val="E6EDF3"/>
-                </a:solidFill>
-                <a:latin typeface="Consolas" pitchFamily="34" charset="0"/>
-                <a:ea typeface="Consolas" pitchFamily="34" charset="-122"/>
-                <a:cs typeface="Consolas" pitchFamily="34" charset="-120"/>
-              </a:rPr>
-              <a:t> </a:t>
-            </a:r>
-            <a:endParaRPr lang="en-US" sz="1500" dirty="0"/>
-          </a:p>
-          <a:p>
-            <a:pPr indent="0" marL="0">
-              <a:lnSpc>
-                <a:spcPct val="105000"/>
-              </a:lnSpc>
-              <a:buNone/>
-            </a:pPr>
-            <a:r>
-              <a:rPr lang="en-US" sz="1500" dirty="0">
-                <a:solidFill>
-                  <a:srgbClr val="FFCB6B"/>
-                </a:solidFill>
-                <a:latin typeface="Consolas" pitchFamily="34" charset="0"/>
-                <a:ea typeface="Consolas" pitchFamily="34" charset="-122"/>
-                <a:cs typeface="Consolas" pitchFamily="34" charset="-120"/>
-              </a:rPr>
-              <a:t>Text</a:t>
-            </a:r>
-            <a:pPr indent="0" marL="0">
-              <a:lnSpc>
-                <a:spcPct val="105000"/>
-              </a:lnSpc>
-              <a:buNone/>
-            </a:pPr>
-            <a:r>
-              <a:rPr lang="en-US" sz="1500" dirty="0">
-                <a:solidFill>
-                  <a:srgbClr val="E6EDF3"/>
-                </a:solidFill>
-                <a:latin typeface="Consolas" pitchFamily="34" charset="0"/>
-                <a:ea typeface="Consolas" pitchFamily="34" charset="-122"/>
-                <a:cs typeface="Consolas" pitchFamily="34" charset="-120"/>
-              </a:rPr>
-              <a:t>(</a:t>
-            </a:r>
-            <a:pPr indent="0" marL="0">
-              <a:lnSpc>
-                <a:spcPct val="105000"/>
-              </a:lnSpc>
-              <a:buNone/>
-            </a:pPr>
-            <a:r>
-              <a:rPr lang="en-US" sz="1500" dirty="0">
-                <a:solidFill>
-                  <a:srgbClr val="C3E88D"/>
-                </a:solidFill>
-                <a:latin typeface="Consolas" pitchFamily="34" charset="0"/>
-                <a:ea typeface="Consolas" pitchFamily="34" charset="-122"/>
-                <a:cs typeface="Consolas" pitchFamily="34" charset="-120"/>
-              </a:rPr>
               <a:t>'Aplikasi Pertamaku'</a:t>
             </a:r>
-            <a:pPr indent="0" marL="0">
-              <a:lnSpc>
-                <a:spcPct val="105000"/>
-              </a:lnSpc>
-              <a:buNone/>
-            </a:pPr>
             <a:r>
               <a:rPr lang="en-US" sz="1500" dirty="0">
                 <a:solidFill>
